--- a/presentations/04_Client_Consultation_Walkthrough_AR.pptx
+++ b/presentations/04_Client_Consultation_Walkthrough_AR.pptx
@@ -122,7 +122,7 @@
   <p:extLst>
     <p:ext uri="{521415D9-36F7-43E2-AB2F-B90AF26B5E84}">
       <p14:sectionLst xmlns:p14="http://schemas.microsoft.com/office/powerpoint/2010/main">
-        <p14:section name="الترحيب" id="{894f5c6b-41d7-e493-0d2d-73fe4c812cfb}">
+        <p14:section name="الترحيب" id="{5f044c04-36dd-9e12-cea4-bf5381d87fc2}">
           <p14:sldIdLst>
             <p14:sldId id="256"/>
             <p14:sldId id="257"/>
@@ -1944,7 +1944,7 @@
     <p:bg>
       <p:bgPr>
         <a:solidFill>
-          <a:srgbClr val="0B0B0B"/>
+          <a:srgbClr val="0E2238"/>
         </a:solidFill>
       </p:bgPr>
     </p:bg>
@@ -1962,106 +1962,30 @@
           <a:chExt cx="0" cy="0"/>
         </a:xfrm>
       </p:grpSpPr>
-      <p:sp>
-        <p:nvSpPr>
-          <p:cNvPr id="2" name="Shape 0"/>
-          <p:cNvSpPr/>
-          <p:nvPr/>
-        </p:nvSpPr>
-        <p:spPr>
-          <a:xfrm>
-            <a:off x="8394192" y="4626864"/>
-            <a:ext cx="384048" cy="384048"/>
-          </a:xfrm>
-          <a:prstGeom prst="rect">
-            <a:avLst/>
-          </a:prstGeom>
-          <a:solidFill>
-            <a:srgbClr val="0B0B0B"/>
-          </a:solidFill>
-          <a:ln w="9525">
-            <a:solidFill>
-              <a:srgbClr val="B08D57"/>
-            </a:solidFill>
-            <a:prstDash val="solid"/>
-          </a:ln>
-        </p:spPr>
-      </p:sp>
-      <p:sp>
-        <p:nvSpPr>
-          <p:cNvPr id="3" name="Text 1"/>
-          <p:cNvSpPr/>
-          <p:nvPr/>
-        </p:nvSpPr>
-        <p:spPr>
-          <a:xfrm>
-            <a:off x="8394192" y="4626864"/>
-            <a:ext cx="384048" cy="384048"/>
-          </a:xfrm>
-          <a:prstGeom prst="rect">
-            <a:avLst/>
-          </a:prstGeom>
-          <a:noFill/>
-          <a:ln/>
-        </p:spPr>
-        <p:txBody>
-          <a:bodyPr wrap="square" lIns="0" tIns="0" rIns="0" bIns="0" rtlCol="0" anchor="ctr"/>
-          <a:lstStyle/>
-          <a:p>
-            <a:pPr algn="ctr" indent="0" marL="0">
-              <a:buNone/>
-            </a:pPr>
-            <a:r>
-              <a:rPr lang="en-US" sz="1000" b="1" dirty="0">
-                <a:solidFill>
-                  <a:srgbClr val="B08D57"/>
-                </a:solidFill>
-                <a:latin typeface="Cambria" pitchFamily="34" charset="0"/>
-                <a:ea typeface="Cambria" pitchFamily="34" charset="-122"/>
-                <a:cs typeface="Cambria" pitchFamily="34" charset="-120"/>
-              </a:rPr>
-              <a:t>RK</a:t>
-            </a:r>
-            <a:endParaRPr lang="en-US" sz="1000" dirty="0"/>
-          </a:p>
-        </p:txBody>
-      </p:sp>
-      <p:sp>
-        <p:nvSpPr>
-          <p:cNvPr id="4" name="Text 2"/>
-          <p:cNvSpPr/>
-          <p:nvPr/>
-        </p:nvSpPr>
-        <p:spPr>
-          <a:xfrm>
-            <a:off x="3200400" y="4626864"/>
-            <a:ext cx="5120640" cy="384048"/>
-          </a:xfrm>
-          <a:prstGeom prst="rect">
-            <a:avLst/>
-          </a:prstGeom>
-          <a:noFill/>
-          <a:ln/>
-        </p:spPr>
-        <p:txBody>
-          <a:bodyPr wrap="square" lIns="0" tIns="0" rIns="0" bIns="0" rtlCol="0" anchor="ctr"/>
-          <a:lstStyle/>
-          <a:p>
-            <a:pPr algn="r" indent="0" marL="0">
-              <a:buNone/>
-            </a:pPr>
-            <a:r>
-              <a:rPr lang="en-US" sz="900" dirty="0">
-                <a:solidFill>
-                  <a:srgbClr val="D8C39A"/>
-                </a:solidFill>
-              </a:rPr>
-              <a:t>راشد الكيتوب للمحاماة والاستشارات القانونية</a:t>
-            </a:r>
-            <a:endParaRPr lang="en-US" sz="900" dirty="0"/>
-          </a:p>
-        </p:txBody>
-      </p:sp>
+      <p:pic>
+        <p:nvPicPr>
+          <p:cNvPr id="2" name="Image 0" descr="/tmp/claude-0/-home-user-aa/b81485da-2e22-5d10-878f-01904e6d5dc6/scratchpad/rk/logo_dark.png">    </p:cNvPr>
+          <p:cNvPicPr>
+            <a:picLocks noChangeAspect="1"/>
+          </p:cNvPicPr>
+          <p:nvPr/>
+        </p:nvPicPr>
+        <p:blipFill>
+          <a:blip r:embed="rId1"/>
+          <a:stretch>
+            <a:fillRect/>
+          </a:stretch>
+        </p:blipFill>
+        <p:spPr>
+          <a:xfrm>
+            <a:off x="7102823" y="4681728"/>
+            <a:ext cx="1675417" cy="274320"/>
+          </a:xfrm>
+          <a:prstGeom prst="rect">
+            <a:avLst/>
+          </a:prstGeom>
+        </p:spPr>
+      </p:pic>
       <p:sp>
         <p:nvSpPr>
           <p:cNvPr id="25" name="Slide Number Placeholder 0"/>
@@ -2092,7 +2016,7 @@
             <a:lvl1pPr>
               <a:defRPr sz="900">
                 <a:solidFill>
-                  <a:srgbClr val="D8C39A"/>
+                  <a:srgbClr val="D9B38C"/>
                 </a:solidFill>
               </a:defRPr>
             </a:lvl1pPr>
@@ -2139,118 +2063,42 @@
           <a:chExt cx="0" cy="0"/>
         </a:xfrm>
       </p:grpSpPr>
-      <p:sp>
-        <p:nvSpPr>
-          <p:cNvPr id="2" name="Shape 0"/>
-          <p:cNvSpPr/>
-          <p:nvPr/>
-        </p:nvSpPr>
-        <p:spPr>
-          <a:xfrm>
-            <a:off x="8394192" y="4626864"/>
-            <a:ext cx="384048" cy="384048"/>
-          </a:xfrm>
-          <a:prstGeom prst="rect">
-            <a:avLst/>
-          </a:prstGeom>
-          <a:solidFill>
-            <a:srgbClr val="FFFFFF"/>
-          </a:solidFill>
-          <a:ln w="9525">
-            <a:solidFill>
-              <a:srgbClr val="B08D57"/>
-            </a:solidFill>
-            <a:prstDash val="solid"/>
-          </a:ln>
-        </p:spPr>
-      </p:sp>
-      <p:sp>
-        <p:nvSpPr>
-          <p:cNvPr id="3" name="Text 1"/>
-          <p:cNvSpPr/>
-          <p:nvPr/>
-        </p:nvSpPr>
-        <p:spPr>
-          <a:xfrm>
-            <a:off x="8394192" y="4626864"/>
-            <a:ext cx="384048" cy="384048"/>
-          </a:xfrm>
-          <a:prstGeom prst="rect">
-            <a:avLst/>
-          </a:prstGeom>
-          <a:noFill/>
-          <a:ln/>
-        </p:spPr>
-        <p:txBody>
-          <a:bodyPr wrap="square" lIns="0" tIns="0" rIns="0" bIns="0" rtlCol="0" anchor="ctr"/>
-          <a:lstStyle/>
-          <a:p>
-            <a:pPr algn="ctr" indent="0" marL="0">
-              <a:buNone/>
-            </a:pPr>
-            <a:r>
-              <a:rPr lang="en-US" sz="1000" b="1" dirty="0">
-                <a:solidFill>
-                  <a:srgbClr val="B08D57"/>
-                </a:solidFill>
-                <a:latin typeface="Cambria" pitchFamily="34" charset="0"/>
-                <a:ea typeface="Cambria" pitchFamily="34" charset="-122"/>
-                <a:cs typeface="Cambria" pitchFamily="34" charset="-120"/>
-              </a:rPr>
-              <a:t>RK</a:t>
-            </a:r>
-            <a:endParaRPr lang="en-US" sz="1000" dirty="0"/>
-          </a:p>
-        </p:txBody>
-      </p:sp>
-      <p:sp>
-        <p:nvSpPr>
-          <p:cNvPr id="4" name="Text 2"/>
-          <p:cNvSpPr/>
-          <p:nvPr/>
-        </p:nvSpPr>
-        <p:spPr>
-          <a:xfrm>
-            <a:off x="3200400" y="4626864"/>
-            <a:ext cx="5120640" cy="384048"/>
-          </a:xfrm>
-          <a:prstGeom prst="rect">
-            <a:avLst/>
-          </a:prstGeom>
-          <a:noFill/>
-          <a:ln/>
-        </p:spPr>
-        <p:txBody>
-          <a:bodyPr wrap="square" lIns="0" tIns="0" rIns="0" bIns="0" rtlCol="0" anchor="ctr"/>
-          <a:lstStyle/>
-          <a:p>
-            <a:pPr algn="r" indent="0" marL="0">
-              <a:buNone/>
-            </a:pPr>
-            <a:r>
-              <a:rPr lang="en-US" sz="900" dirty="0">
-                <a:solidFill>
-                  <a:srgbClr val="6B6F76"/>
-                </a:solidFill>
-              </a:rPr>
-              <a:t>راشد الكيتوب للمحاماة والاستشارات القانونية</a:t>
-            </a:r>
-            <a:endParaRPr lang="en-US" sz="900" dirty="0"/>
-          </a:p>
-        </p:txBody>
-      </p:sp>
-      <p:sp>
-        <p:nvSpPr>
-          <p:cNvPr id="5" name="Text 3"/>
+      <p:pic>
+        <p:nvPicPr>
+          <p:cNvPr id="2" name="Image 0" descr="/tmp/claude-0/-home-user-aa/b81485da-2e22-5d10-878f-01904e6d5dc6/scratchpad/rk/logo_light.png">    </p:cNvPr>
+          <p:cNvPicPr>
+            <a:picLocks noChangeAspect="1"/>
+          </p:cNvPicPr>
+          <p:nvPr/>
+        </p:nvPicPr>
+        <p:blipFill>
+          <a:blip r:embed="rId1"/>
+          <a:stretch>
+            <a:fillRect/>
+          </a:stretch>
+        </p:blipFill>
+        <p:spPr>
+          <a:xfrm>
+            <a:off x="7102823" y="4681728"/>
+            <a:ext cx="1675417" cy="274320"/>
+          </a:xfrm>
+          <a:prstGeom prst="rect">
+            <a:avLst/>
+          </a:prstGeom>
+        </p:spPr>
+      </p:pic>
+      <p:sp>
+        <p:nvSpPr>
+          <p:cNvPr id="3" name="Text 0"/>
           <p:cNvSpPr/>
           <p:nvPr>
-            <p:ph idx="103" type="title" hasCustomPrompt="1"/>
+            <p:ph idx="101" type="title" hasCustomPrompt="1"/>
           </p:nvPr>
         </p:nvSpPr>
         <p:spPr>
           <a:xfrm>
-            <a:off x="457200" y="347472"/>
-            <a:ext cx="8229600" cy="685800"/>
+            <a:off x="457200" y="420624"/>
+            <a:ext cx="8229600" cy="731520"/>
           </a:xfrm>
           <a:prstGeom prst="rect">
             <a:avLst/>
@@ -2265,7 +2113,7 @@
               <a:buNone/>
               <a:defRPr lang="en-US" sz="2600" b="1" dirty="0">
                 <a:solidFill>
-                  <a:srgbClr val="0B0B0B"/>
+                  <a:srgbClr val="0E2238"/>
                 </a:solidFill>
               </a:defRPr>
             </a:lvl1pPr>
@@ -2308,7 +2156,7 @@
             <a:lvl1pPr>
               <a:defRPr sz="900">
                 <a:solidFill>
-                  <a:srgbClr val="6B6F76"/>
+                  <a:srgbClr val="6E7B88"/>
                 </a:solidFill>
               </a:defRPr>
             </a:lvl1pPr>
@@ -2337,7 +2185,7 @@
     <p:bg>
       <p:bgPr>
         <a:solidFill>
-          <a:srgbClr val="0B0B0B"/>
+          <a:srgbClr val="0E2238"/>
         </a:solidFill>
       </p:bgPr>
     </p:bg>
@@ -2410,7 +2258,7 @@
             <a:lvl1pPr>
               <a:defRPr sz="900">
                 <a:solidFill>
-                  <a:srgbClr val="D8C39A"/>
+                  <a:srgbClr val="D9B38C"/>
                 </a:solidFill>
               </a:defRPr>
             </a:lvl1pPr>
@@ -2721,47 +2569,46 @@
           </a:prstGeom>
           <a:ln w="9525">
             <a:solidFill>
-              <a:srgbClr val="B08D57"/>
+              <a:srgbClr val="B5723B"/>
             </a:solidFill>
             <a:prstDash val="solid"/>
           </a:ln>
         </p:spPr>
       </p:sp>
-      <p:sp>
-        <p:nvSpPr>
-          <p:cNvPr id="3" name="Shape 1"/>
-          <p:cNvSpPr/>
-          <p:nvPr/>
-        </p:nvSpPr>
-        <p:spPr>
-          <a:xfrm>
-            <a:off x="7452360" y="868680"/>
-            <a:ext cx="822960" cy="822960"/>
-          </a:xfrm>
-          <a:prstGeom prst="rect">
-            <a:avLst/>
-          </a:prstGeom>
-          <a:solidFill>
-            <a:srgbClr val="0B0B0B"/>
-          </a:solidFill>
-          <a:ln w="12700">
-            <a:solidFill>
-              <a:srgbClr val="B08D57"/>
-            </a:solidFill>
-            <a:prstDash val="solid"/>
-          </a:ln>
-        </p:spPr>
-      </p:sp>
-      <p:sp>
-        <p:nvSpPr>
-          <p:cNvPr id="4" name="Text 2"/>
+      <p:pic>
+        <p:nvPicPr>
+          <p:cNvPr id="3" name="Image 0" descr="/tmp/claude-0/-home-user-aa/b81485da-2e22-5d10-878f-01904e6d5dc6/scratchpad/rk/logo_dark.png">    </p:cNvPr>
+          <p:cNvPicPr>
+            <a:picLocks noChangeAspect="1"/>
+          </p:cNvPicPr>
+          <p:nvPr/>
+        </p:nvPicPr>
+        <p:blipFill>
+          <a:blip r:embed="rId1"/>
+          <a:stretch>
+            <a:fillRect/>
+          </a:stretch>
+        </p:blipFill>
+        <p:spPr>
+          <a:xfrm>
+            <a:off x="4254320" y="868680"/>
+            <a:ext cx="4021000" cy="658368"/>
+          </a:xfrm>
+          <a:prstGeom prst="rect">
+            <a:avLst/>
+          </a:prstGeom>
+        </p:spPr>
+      </p:pic>
+      <p:sp>
+        <p:nvSpPr>
+          <p:cNvPr id="4" name="Text 1"/>
           <p:cNvSpPr txBox="1"/>
           <p:nvPr/>
         </p:nvSpPr>
         <p:spPr>
           <a:xfrm>
-            <a:off x="7452360" y="868680"/>
-            <a:ext cx="822960" cy="822960"/>
+            <a:off x="868680" y="1965960"/>
+            <a:ext cx="7406640" cy="1371600"/>
           </a:xfrm>
           <a:prstGeom prst="rect">
             <a:avLst/>
@@ -2773,34 +2620,34 @@
           <a:bodyPr wrap="square" lIns="0" tIns="0" rIns="0" bIns="0" rtlCol="0" anchor="ctr"/>
           <a:lstStyle/>
           <a:p>
-            <a:pPr algn="ctr" indent="0" marL="0">
-              <a:buNone/>
-            </a:pPr>
-            <a:r>
-              <a:rPr lang="en-US" sz="2400" b="1" dirty="0">
-                <a:solidFill>
-                  <a:schemeClr val="accent1"/>
+            <a:pPr rtl="1" algn="r" indent="0" marL="0">
+              <a:buNone/>
+            </a:pPr>
+            <a:r>
+              <a:rPr lang="ar-AE" altLang="en-US" sz="3400" b="1" dirty="0">
+                <a:solidFill>
+                  <a:schemeClr val="bg1"/>
                 </a:solidFill>
                 <a:latin typeface="Cambria" pitchFamily="34" charset="0"/>
                 <a:ea typeface="Cambria" pitchFamily="34" charset="-122"/>
                 <a:cs typeface="Cambria" pitchFamily="34" charset="-120"/>
               </a:rPr>
-              <a:t>RK</a:t>
-            </a:r>
-            <a:endParaRPr lang="en-US" sz="2400" dirty="0"/>
-          </a:p>
-        </p:txBody>
-      </p:sp>
-      <p:sp>
-        <p:nvSpPr>
-          <p:cNvPr id="5" name="Text 3"/>
+              <a:t>حماية أصولك وعائلتك في الإمارات</a:t>
+            </a:r>
+            <a:endParaRPr lang="ar-AE" sz="3400" dirty="0"/>
+          </a:p>
+        </p:txBody>
+      </p:sp>
+      <p:sp>
+        <p:nvSpPr>
+          <p:cNvPr id="5" name="Text 2"/>
           <p:cNvSpPr txBox="1"/>
           <p:nvPr/>
         </p:nvSpPr>
         <p:spPr>
           <a:xfrm>
-            <a:off x="1325880" y="868680"/>
-            <a:ext cx="5943600" cy="822960"/>
+            <a:off x="868680" y="3383280"/>
+            <a:ext cx="7406640" cy="548640"/>
           </a:xfrm>
           <a:prstGeom prst="rect">
             <a:avLst/>
@@ -2809,93 +2656,18 @@
           <a:ln/>
         </p:spPr>
         <p:txBody>
-          <a:bodyPr wrap="square" lIns="0" tIns="0" rIns="0" bIns="0" rtlCol="0" anchor="ctr"/>
+          <a:bodyPr wrap="square" lIns="0" tIns="0" rIns="0" bIns="0" rtlCol="0" anchor="t"/>
           <a:lstStyle/>
           <a:p>
             <a:pPr rtl="1" algn="r" indent="0" marL="0">
               <a:buNone/>
             </a:pPr>
             <a:r>
-              <a:rPr lang="ar-AE" altLang="en-US" sz="1200" dirty="0">
+              <a:rPr lang="ar-AE" altLang="en-US" sz="1500" dirty="0">
                 <a:solidFill>
                   <a:schemeClr val="accent2"/>
                 </a:solidFill>
               </a:rPr>
-              <a:t>راشد الكيتوب للمحاماة والاستشارات القانونية</a:t>
-            </a:r>
-            <a:endParaRPr lang="ar-AE" sz="1200" dirty="0"/>
-          </a:p>
-        </p:txBody>
-      </p:sp>
-      <p:sp>
-        <p:nvSpPr>
-          <p:cNvPr id="6" name="Text 4"/>
-          <p:cNvSpPr txBox="1"/>
-          <p:nvPr/>
-        </p:nvSpPr>
-        <p:spPr>
-          <a:xfrm>
-            <a:off x="868680" y="1965960"/>
-            <a:ext cx="7406640" cy="1371600"/>
-          </a:xfrm>
-          <a:prstGeom prst="rect">
-            <a:avLst/>
-          </a:prstGeom>
-          <a:noFill/>
-          <a:ln/>
-        </p:spPr>
-        <p:txBody>
-          <a:bodyPr wrap="square" lIns="0" tIns="0" rIns="0" bIns="0" rtlCol="0" anchor="ctr"/>
-          <a:lstStyle/>
-          <a:p>
-            <a:pPr rtl="1" algn="r" indent="0" marL="0">
-              <a:buNone/>
-            </a:pPr>
-            <a:r>
-              <a:rPr lang="ar-AE" altLang="en-US" sz="3400" b="1" dirty="0">
-                <a:solidFill>
-                  <a:schemeClr val="bg1"/>
-                </a:solidFill>
-                <a:latin typeface="Cambria" pitchFamily="34" charset="0"/>
-                <a:ea typeface="Cambria" pitchFamily="34" charset="-122"/>
-                <a:cs typeface="Cambria" pitchFamily="34" charset="-120"/>
-              </a:rPr>
-              <a:t>حماية أصولك وعائلتك في الإمارات</a:t>
-            </a:r>
-            <a:endParaRPr lang="ar-AE" sz="3400" dirty="0"/>
-          </a:p>
-        </p:txBody>
-      </p:sp>
-      <p:sp>
-        <p:nvSpPr>
-          <p:cNvPr id="7" name="Text 5"/>
-          <p:cNvSpPr txBox="1"/>
-          <p:nvPr/>
-        </p:nvSpPr>
-        <p:spPr>
-          <a:xfrm>
-            <a:off x="868680" y="3383280"/>
-            <a:ext cx="7406640" cy="548640"/>
-          </a:xfrm>
-          <a:prstGeom prst="rect">
-            <a:avLst/>
-          </a:prstGeom>
-          <a:noFill/>
-          <a:ln/>
-        </p:spPr>
-        <p:txBody>
-          <a:bodyPr wrap="square" lIns="0" tIns="0" rIns="0" bIns="0" rtlCol="0" anchor="t"/>
-          <a:lstStyle/>
-          <a:p>
-            <a:pPr rtl="1" algn="r" indent="0" marL="0">
-              <a:buNone/>
-            </a:pPr>
-            <a:r>
-              <a:rPr lang="ar-AE" altLang="en-US" sz="1500" dirty="0">
-                <a:solidFill>
-                  <a:schemeClr val="accent2"/>
-                </a:solidFill>
-              </a:rPr>
               <a:t>جلسة تعريفية بخيارات التخطيط القانوني للمستثمرين ومالكي العقارات</a:t>
             </a:r>
             <a:endParaRPr lang="ar-AE" sz="1500" dirty="0"/>
@@ -2904,7 +2676,7 @@
       </p:sp>
       <p:sp>
         <p:nvSpPr>
-          <p:cNvPr id="8" name="Text 6"/>
+          <p:cNvPr id="6" name="Text 3"/>
           <p:cNvSpPr txBox="1"/>
           <p:nvPr/>
         </p:nvSpPr>
@@ -2968,7 +2740,7 @@
             <a:lvl1pPr>
               <a:defRPr sz="900">
                 <a:solidFill>
-                  <a:srgbClr val="D8C39A"/>
+                  <a:srgbClr val="D9B38C"/>
                 </a:solidFill>
               </a:defRPr>
             </a:lvl1pPr>
@@ -3010,16 +2782,14 @@
       </p:grpSpPr>
       <p:sp>
         <p:nvSpPr>
-          <p:cNvPr id="2" name="Text 3"/>
-          <p:cNvSpPr/>
-          <p:nvPr>
-            <p:ph idx="103" type="title" hasCustomPrompt="1"/>
-          </p:nvPr>
-        </p:nvSpPr>
-        <p:spPr>
-          <a:xfrm>
-            <a:off x="457200" y="347472"/>
-            <a:ext cx="8229600" cy="685800"/>
+          <p:cNvPr id="2" name="Text 0"/>
+          <p:cNvSpPr txBox="1"/>
+          <p:nvPr/>
+        </p:nvSpPr>
+        <p:spPr>
+          <a:xfrm>
+            <a:off x="457200" y="402336"/>
+            <a:ext cx="8229600" cy="749808"/>
           </a:xfrm>
           <a:prstGeom prst="rect">
             <a:avLst/>
@@ -3028,21 +2798,24 @@
           <a:ln/>
         </p:spPr>
         <p:txBody>
-          <a:bodyPr wrap="square" lIns="0" tIns="0" rIns="0" bIns="0" rtlCol="0" anchor="ctr"/>
+          <a:bodyPr wrap="square" lIns="0" tIns="0" rIns="0" bIns="0" rtlCol="0" anchor="t"/>
           <a:lstStyle/>
           <a:p>
             <a:pPr rtl="1" algn="r" indent="0" marL="0">
               <a:buNone/>
             </a:pPr>
             <a:r>
-              <a:rPr lang="en-US" sz="2600" b="1" dirty="0">
-                <a:solidFill>
-                  <a:srgbClr val="0B0B0B"/>
-                </a:solidFill>
+              <a:rPr lang="ar-AE" altLang="en-US" sz="2600" b="1" dirty="0">
+                <a:solidFill>
+                  <a:schemeClr val="tx1"/>
+                </a:solidFill>
+                <a:latin typeface="Cambria" pitchFamily="34" charset="0"/>
+                <a:ea typeface="Cambria" pitchFamily="34" charset="-122"/>
+                <a:cs typeface="Cambria" pitchFamily="34" charset="-120"/>
               </a:rPr>
               <a:t>ما نحتاجه منك</a:t>
             </a:r>
-            <a:endParaRPr lang="en-US" sz="2600" dirty="0"/>
+            <a:endParaRPr lang="ar-AE" sz="2600" dirty="0"/>
           </a:p>
         </p:txBody>
       </p:sp>
@@ -3097,11 +2870,11 @@
             <a:avLst/>
           </a:prstGeom>
           <a:solidFill>
-            <a:srgbClr val="F4F1EA"/>
+            <a:srgbClr val="F4F1EB"/>
           </a:solidFill>
           <a:ln w="12700">
             <a:solidFill>
-              <a:srgbClr val="F4F1EA"/>
+              <a:srgbClr val="F4F1EB"/>
             </a:solidFill>
             <a:prstDash val="solid"/>
           </a:ln>
@@ -3202,11 +2975,11 @@
             <a:avLst/>
           </a:prstGeom>
           <a:solidFill>
-            <a:srgbClr val="F4F1EA"/>
+            <a:srgbClr val="F4F1EB"/>
           </a:solidFill>
           <a:ln w="12700">
             <a:solidFill>
-              <a:srgbClr val="F4F1EA"/>
+              <a:srgbClr val="F4F1EB"/>
             </a:solidFill>
             <a:prstDash val="solid"/>
           </a:ln>
@@ -3307,11 +3080,11 @@
             <a:avLst/>
           </a:prstGeom>
           <a:solidFill>
-            <a:srgbClr val="F4F1EA"/>
+            <a:srgbClr val="F4F1EB"/>
           </a:solidFill>
           <a:ln w="12700">
             <a:solidFill>
-              <a:srgbClr val="F4F1EA"/>
+              <a:srgbClr val="F4F1EB"/>
             </a:solidFill>
             <a:prstDash val="solid"/>
           </a:ln>
@@ -3412,11 +3185,11 @@
             <a:avLst/>
           </a:prstGeom>
           <a:solidFill>
-            <a:srgbClr val="F4F1EA"/>
+            <a:srgbClr val="F4F1EB"/>
           </a:solidFill>
           <a:ln w="12700">
             <a:solidFill>
-              <a:srgbClr val="F4F1EA"/>
+              <a:srgbClr val="F4F1EB"/>
             </a:solidFill>
             <a:prstDash val="solid"/>
           </a:ln>
@@ -3517,11 +3290,11 @@
             <a:avLst/>
           </a:prstGeom>
           <a:solidFill>
-            <a:srgbClr val="F4F1EA"/>
+            <a:srgbClr val="F4F1EB"/>
           </a:solidFill>
           <a:ln w="12700">
             <a:solidFill>
-              <a:srgbClr val="F4F1EA"/>
+              <a:srgbClr val="F4F1EB"/>
             </a:solidFill>
             <a:prstDash val="solid"/>
           </a:ln>
@@ -3622,11 +3395,11 @@
             <a:avLst/>
           </a:prstGeom>
           <a:solidFill>
-            <a:srgbClr val="0B0B0B"/>
+            <a:srgbClr val="0E2238"/>
           </a:solidFill>
           <a:ln w="12700">
             <a:solidFill>
-              <a:srgbClr val="0B0B0B"/>
+              <a:srgbClr val="0E2238"/>
             </a:solidFill>
             <a:prstDash val="solid"/>
           </a:ln>
@@ -3648,7 +3421,7 @@
           </a:prstGeom>
           <a:ln w="9525">
             <a:solidFill>
-              <a:srgbClr val="B08D57"/>
+              <a:srgbClr val="B5723B"/>
             </a:solidFill>
             <a:prstDash val="solid"/>
           </a:ln>
@@ -3726,6 +3499,36 @@
               <a:t>الترجمة القانونية، تنسيق الشهود، التوثيق، حجز موعد التسجيل، والحضور معك.</a:t>
             </a:r>
             <a:endParaRPr lang="ar-AE" sz="1150" dirty="0"/>
+          </a:p>
+        </p:txBody>
+      </p:sp>
+      <p:sp>
+        <p:nvSpPr>
+          <p:cNvPr id="23" name="Text 0"/>
+          <p:cNvSpPr/>
+          <p:nvPr>
+            <p:ph idx="101" type="title" hasCustomPrompt="1"/>
+          </p:nvPr>
+        </p:nvSpPr>
+        <p:spPr>
+          <a:xfrm>
+            <a:off x="457200" y="420624"/>
+            <a:ext cx="8229600" cy="731520"/>
+          </a:xfrm>
+          <a:prstGeom prst="rect">
+            <a:avLst/>
+          </a:prstGeom>
+          <a:noFill/>
+          <a:ln/>
+        </p:spPr>
+        <p:txBody>
+          <a:bodyPr wrap="square" lIns="0" tIns="0" rIns="0" bIns="0" rtlCol="0" anchor="t"/>
+          <a:lstStyle/>
+          <a:p>
+            <a:pPr algn="r" indent="0" marL="0">
+              <a:buNone/>
+            </a:pPr>
+            <a:endParaRPr lang="en-US" sz="2600" dirty="0"/>
           </a:p>
         </p:txBody>
       </p:sp>
@@ -3759,7 +3562,7 @@
             <a:lvl1pPr>
               <a:defRPr sz="900">
                 <a:solidFill>
-                  <a:srgbClr val="6B6F76"/>
+                  <a:srgbClr val="6E7B88"/>
                 </a:solidFill>
               </a:defRPr>
             </a:lvl1pPr>
@@ -3801,16 +3604,14 @@
       </p:grpSpPr>
       <p:sp>
         <p:nvSpPr>
-          <p:cNvPr id="2" name="Text 3"/>
-          <p:cNvSpPr/>
-          <p:nvPr>
-            <p:ph idx="103" type="title" hasCustomPrompt="1"/>
-          </p:nvPr>
-        </p:nvSpPr>
-        <p:spPr>
-          <a:xfrm>
-            <a:off x="457200" y="347472"/>
-            <a:ext cx="8229600" cy="685800"/>
+          <p:cNvPr id="2" name="Text 0"/>
+          <p:cNvSpPr txBox="1"/>
+          <p:nvPr/>
+        </p:nvSpPr>
+        <p:spPr>
+          <a:xfrm>
+            <a:off x="457200" y="402336"/>
+            <a:ext cx="8229600" cy="749808"/>
           </a:xfrm>
           <a:prstGeom prst="rect">
             <a:avLst/>
@@ -3819,21 +3620,24 @@
           <a:ln/>
         </p:spPr>
         <p:txBody>
-          <a:bodyPr wrap="square" lIns="0" tIns="0" rIns="0" bIns="0" rtlCol="0" anchor="ctr"/>
+          <a:bodyPr wrap="square" lIns="0" tIns="0" rIns="0" bIns="0" rtlCol="0" anchor="t"/>
           <a:lstStyle/>
           <a:p>
             <a:pPr rtl="1" algn="r" indent="0" marL="0">
               <a:buNone/>
             </a:pPr>
             <a:r>
-              <a:rPr lang="en-US" sz="2600" b="1" dirty="0">
-                <a:solidFill>
-                  <a:srgbClr val="0B0B0B"/>
-                </a:solidFill>
+              <a:rPr lang="ar-AE" altLang="en-US" sz="2600" b="1" dirty="0">
+                <a:solidFill>
+                  <a:schemeClr val="tx1"/>
+                </a:solidFill>
+                <a:latin typeface="Cambria" pitchFamily="34" charset="0"/>
+                <a:ea typeface="Cambria" pitchFamily="34" charset="-122"/>
+                <a:cs typeface="Cambria" pitchFamily="34" charset="-120"/>
               </a:rPr>
               <a:t>خدمة قانونية بمستوى Concierge</a:t>
             </a:r>
-            <a:endParaRPr lang="en-US" sz="2600" dirty="0"/>
+            <a:endParaRPr lang="ar-AE" sz="2600" dirty="0"/>
           </a:p>
         </p:txBody>
       </p:sp>
@@ -3888,11 +3692,11 @@
             <a:avLst/>
           </a:prstGeom>
           <a:solidFill>
-            <a:srgbClr val="F4F1EA"/>
+            <a:srgbClr val="F4F1EB"/>
           </a:solidFill>
           <a:ln w="12700">
             <a:solidFill>
-              <a:srgbClr val="F4F1EA"/>
+              <a:srgbClr val="F4F1EB"/>
             </a:solidFill>
             <a:prstDash val="solid"/>
           </a:ln>
@@ -3993,11 +3797,11 @@
             <a:avLst/>
           </a:prstGeom>
           <a:solidFill>
-            <a:srgbClr val="F4F1EA"/>
+            <a:srgbClr val="F4F1EB"/>
           </a:solidFill>
           <a:ln w="12700">
             <a:solidFill>
-              <a:srgbClr val="F4F1EA"/>
+              <a:srgbClr val="F4F1EB"/>
             </a:solidFill>
             <a:prstDash val="solid"/>
           </a:ln>
@@ -4098,11 +3902,11 @@
             <a:avLst/>
           </a:prstGeom>
           <a:solidFill>
-            <a:srgbClr val="F4F1EA"/>
+            <a:srgbClr val="F4F1EB"/>
           </a:solidFill>
           <a:ln w="12700">
             <a:solidFill>
-              <a:srgbClr val="F4F1EA"/>
+              <a:srgbClr val="F4F1EB"/>
             </a:solidFill>
             <a:prstDash val="solid"/>
           </a:ln>
@@ -4203,11 +4007,11 @@
             <a:avLst/>
           </a:prstGeom>
           <a:solidFill>
-            <a:srgbClr val="F4F1EA"/>
+            <a:srgbClr val="F4F1EB"/>
           </a:solidFill>
           <a:ln w="12700">
             <a:solidFill>
-              <a:srgbClr val="F4F1EA"/>
+              <a:srgbClr val="F4F1EB"/>
             </a:solidFill>
             <a:prstDash val="solid"/>
           </a:ln>
@@ -4308,11 +4112,11 @@
             <a:avLst/>
           </a:prstGeom>
           <a:solidFill>
-            <a:srgbClr val="F4F1EA"/>
+            <a:srgbClr val="F4F1EB"/>
           </a:solidFill>
           <a:ln w="12700">
             <a:solidFill>
-              <a:srgbClr val="F4F1EA"/>
+              <a:srgbClr val="F4F1EB"/>
             </a:solidFill>
             <a:prstDash val="solid"/>
           </a:ln>
@@ -4400,6 +4204,36 @@
       </p:sp>
       <p:sp>
         <p:nvSpPr>
+          <p:cNvPr id="19" name="Text 0"/>
+          <p:cNvSpPr/>
+          <p:nvPr>
+            <p:ph idx="101" type="title" hasCustomPrompt="1"/>
+          </p:nvPr>
+        </p:nvSpPr>
+        <p:spPr>
+          <a:xfrm>
+            <a:off x="457200" y="420624"/>
+            <a:ext cx="8229600" cy="731520"/>
+          </a:xfrm>
+          <a:prstGeom prst="rect">
+            <a:avLst/>
+          </a:prstGeom>
+          <a:noFill/>
+          <a:ln/>
+        </p:spPr>
+        <p:txBody>
+          <a:bodyPr wrap="square" lIns="0" tIns="0" rIns="0" bIns="0" rtlCol="0" anchor="t"/>
+          <a:lstStyle/>
+          <a:p>
+            <a:pPr algn="r" indent="0" marL="0">
+              <a:buNone/>
+            </a:pPr>
+            <a:endParaRPr lang="en-US" sz="2600" dirty="0"/>
+          </a:p>
+        </p:txBody>
+      </p:sp>
+      <p:sp>
+        <p:nvSpPr>
           <p:cNvPr id="25" name="Slide Number Placeholder 0"/>
           <p:cNvSpPr>
             <a:spLocks noGrp="1"/>
@@ -4428,7 +4262,7 @@
             <a:lvl1pPr>
               <a:defRPr sz="900">
                 <a:solidFill>
-                  <a:srgbClr val="6B6F76"/>
+                  <a:srgbClr val="6E7B88"/>
                 </a:solidFill>
               </a:defRPr>
             </a:lvl1pPr>
@@ -4470,16 +4304,14 @@
       </p:grpSpPr>
       <p:sp>
         <p:nvSpPr>
-          <p:cNvPr id="2" name="Text 3"/>
-          <p:cNvSpPr/>
-          <p:nvPr>
-            <p:ph idx="103" type="title" hasCustomPrompt="1"/>
-          </p:nvPr>
-        </p:nvSpPr>
-        <p:spPr>
-          <a:xfrm>
-            <a:off x="457200" y="347472"/>
-            <a:ext cx="8229600" cy="685800"/>
+          <p:cNvPr id="2" name="Text 0"/>
+          <p:cNvSpPr txBox="1"/>
+          <p:nvPr/>
+        </p:nvSpPr>
+        <p:spPr>
+          <a:xfrm>
+            <a:off x="457200" y="402336"/>
+            <a:ext cx="8229600" cy="749808"/>
           </a:xfrm>
           <a:prstGeom prst="rect">
             <a:avLst/>
@@ -4488,21 +4320,24 @@
           <a:ln/>
         </p:spPr>
         <p:txBody>
-          <a:bodyPr wrap="square" lIns="0" tIns="0" rIns="0" bIns="0" rtlCol="0" anchor="ctr"/>
+          <a:bodyPr wrap="square" lIns="0" tIns="0" rIns="0" bIns="0" rtlCol="0" anchor="t"/>
           <a:lstStyle/>
           <a:p>
             <a:pPr rtl="1" algn="r" indent="0" marL="0">
               <a:buNone/>
             </a:pPr>
             <a:r>
-              <a:rPr lang="en-US" sz="2600" b="1" dirty="0">
-                <a:solidFill>
-                  <a:srgbClr val="0B0B0B"/>
-                </a:solidFill>
+              <a:rPr lang="ar-AE" altLang="en-US" sz="2600" b="1" dirty="0">
+                <a:solidFill>
+                  <a:schemeClr val="tx1"/>
+                </a:solidFill>
+                <a:latin typeface="Cambria" pitchFamily="34" charset="0"/>
+                <a:ea typeface="Cambria" pitchFamily="34" charset="-122"/>
+                <a:cs typeface="Cambria" pitchFamily="34" charset="-120"/>
               </a:rPr>
               <a:t>أي خيار يناسبك؟</a:t>
             </a:r>
-            <a:endParaRPr lang="en-US" sz="2600" dirty="0"/>
+            <a:endParaRPr lang="ar-AE" sz="2600" dirty="0"/>
           </a:p>
         </p:txBody>
       </p:sp>
@@ -4629,11 +4464,11 @@
             <a:avLst/>
           </a:prstGeom>
           <a:solidFill>
-            <a:srgbClr val="F4F1EA"/>
+            <a:srgbClr val="F4F1EB"/>
           </a:solidFill>
           <a:ln w="12700">
             <a:solidFill>
-              <a:srgbClr val="F4F1EA"/>
+              <a:srgbClr val="F4F1EB"/>
             </a:solidFill>
             <a:prstDash val="solid"/>
           </a:ln>
@@ -4754,7 +4589,7 @@
           </a:solidFill>
           <a:ln w="12700">
             <a:solidFill>
-              <a:srgbClr val="F4F1EA"/>
+              <a:srgbClr val="F4F1EB"/>
             </a:solidFill>
             <a:prstDash val="solid"/>
           </a:ln>
@@ -4871,11 +4706,11 @@
             <a:avLst/>
           </a:prstGeom>
           <a:solidFill>
-            <a:srgbClr val="F4F1EA"/>
+            <a:srgbClr val="F4F1EB"/>
           </a:solidFill>
           <a:ln w="12700">
             <a:solidFill>
-              <a:srgbClr val="F4F1EA"/>
+              <a:srgbClr val="F4F1EB"/>
             </a:solidFill>
             <a:prstDash val="solid"/>
           </a:ln>
@@ -4996,7 +4831,7 @@
           </a:solidFill>
           <a:ln w="12700">
             <a:solidFill>
-              <a:srgbClr val="F4F1EA"/>
+              <a:srgbClr val="F4F1EB"/>
             </a:solidFill>
             <a:prstDash val="solid"/>
           </a:ln>
@@ -5113,11 +4948,11 @@
             <a:avLst/>
           </a:prstGeom>
           <a:solidFill>
-            <a:srgbClr val="F4F1EA"/>
+            <a:srgbClr val="F4F1EB"/>
           </a:solidFill>
           <a:ln w="12700">
             <a:solidFill>
-              <a:srgbClr val="F4F1EA"/>
+              <a:srgbClr val="F4F1EB"/>
             </a:solidFill>
             <a:prstDash val="solid"/>
           </a:ln>
@@ -5238,7 +5073,7 @@
           </a:solidFill>
           <a:ln w="12700">
             <a:solidFill>
-              <a:srgbClr val="F4F1EA"/>
+              <a:srgbClr val="F4F1EB"/>
             </a:solidFill>
             <a:prstDash val="solid"/>
           </a:ln>
@@ -5355,11 +5190,11 @@
             <a:avLst/>
           </a:prstGeom>
           <a:solidFill>
-            <a:srgbClr val="F4F1EA"/>
+            <a:srgbClr val="F4F1EB"/>
           </a:solidFill>
           <a:ln w="12700">
             <a:solidFill>
-              <a:srgbClr val="F4F1EA"/>
+              <a:srgbClr val="F4F1EB"/>
             </a:solidFill>
             <a:prstDash val="solid"/>
           </a:ln>
@@ -5499,6 +5334,36 @@
       </p:sp>
       <p:sp>
         <p:nvSpPr>
+          <p:cNvPr id="35" name="Text 0"/>
+          <p:cNvSpPr/>
+          <p:nvPr>
+            <p:ph idx="101" type="title" hasCustomPrompt="1"/>
+          </p:nvPr>
+        </p:nvSpPr>
+        <p:spPr>
+          <a:xfrm>
+            <a:off x="457200" y="420624"/>
+            <a:ext cx="8229600" cy="731520"/>
+          </a:xfrm>
+          <a:prstGeom prst="rect">
+            <a:avLst/>
+          </a:prstGeom>
+          <a:noFill/>
+          <a:ln/>
+        </p:spPr>
+        <p:txBody>
+          <a:bodyPr wrap="square" lIns="0" tIns="0" rIns="0" bIns="0" rtlCol="0" anchor="t"/>
+          <a:lstStyle/>
+          <a:p>
+            <a:pPr algn="r" indent="0" marL="0">
+              <a:buNone/>
+            </a:pPr>
+            <a:endParaRPr lang="en-US" sz="2600" dirty="0"/>
+          </a:p>
+        </p:txBody>
+      </p:sp>
+      <p:sp>
+        <p:nvSpPr>
           <p:cNvPr id="25" name="Slide Number Placeholder 0"/>
           <p:cNvSpPr>
             <a:spLocks noGrp="1"/>
@@ -5527,7 +5392,7 @@
             <a:lvl1pPr>
               <a:defRPr sz="900">
                 <a:solidFill>
-                  <a:srgbClr val="6B6F76"/>
+                  <a:srgbClr val="6E7B88"/>
                 </a:solidFill>
               </a:defRPr>
             </a:lvl1pPr>
@@ -5569,16 +5434,14 @@
       </p:grpSpPr>
       <p:sp>
         <p:nvSpPr>
-          <p:cNvPr id="2" name="Text 3"/>
-          <p:cNvSpPr/>
-          <p:nvPr>
-            <p:ph idx="103" type="title" hasCustomPrompt="1"/>
-          </p:nvPr>
-        </p:nvSpPr>
-        <p:spPr>
-          <a:xfrm>
-            <a:off x="457200" y="347472"/>
-            <a:ext cx="8229600" cy="685800"/>
+          <p:cNvPr id="2" name="Text 0"/>
+          <p:cNvSpPr txBox="1"/>
+          <p:nvPr/>
+        </p:nvSpPr>
+        <p:spPr>
+          <a:xfrm>
+            <a:off x="457200" y="402336"/>
+            <a:ext cx="8229600" cy="749808"/>
           </a:xfrm>
           <a:prstGeom prst="rect">
             <a:avLst/>
@@ -5587,21 +5450,24 @@
           <a:ln/>
         </p:spPr>
         <p:txBody>
-          <a:bodyPr wrap="square" lIns="0" tIns="0" rIns="0" bIns="0" rtlCol="0" anchor="ctr"/>
+          <a:bodyPr wrap="square" lIns="0" tIns="0" rIns="0" bIns="0" rtlCol="0" anchor="t"/>
           <a:lstStyle/>
           <a:p>
             <a:pPr rtl="1" algn="r" indent="0" marL="0">
               <a:buNone/>
             </a:pPr>
             <a:r>
-              <a:rPr lang="en-US" sz="2600" b="1" dirty="0">
-                <a:solidFill>
-                  <a:srgbClr val="0B0B0B"/>
-                </a:solidFill>
+              <a:rPr lang="ar-AE" altLang="en-US" sz="2600" b="1" dirty="0">
+                <a:solidFill>
+                  <a:schemeClr val="tx1"/>
+                </a:solidFill>
+                <a:latin typeface="Cambria" pitchFamily="34" charset="0"/>
+                <a:ea typeface="Cambria" pitchFamily="34" charset="-122"/>
+                <a:cs typeface="Cambria" pitchFamily="34" charset="-120"/>
               </a:rPr>
               <a:t>أسئلة يطرحها عملاؤنا كثيراً</a:t>
             </a:r>
-            <a:endParaRPr lang="en-US" sz="2600" dirty="0"/>
+            <a:endParaRPr lang="ar-AE" sz="2600" dirty="0"/>
           </a:p>
         </p:txBody>
       </p:sp>
@@ -5656,11 +5522,11 @@
             <a:avLst/>
           </a:prstGeom>
           <a:solidFill>
-            <a:srgbClr val="F4F1EA"/>
+            <a:srgbClr val="F4F1EB"/>
           </a:solidFill>
           <a:ln w="12700">
             <a:solidFill>
-              <a:srgbClr val="F4F1EA"/>
+              <a:srgbClr val="F4F1EB"/>
             </a:solidFill>
             <a:prstDash val="solid"/>
           </a:ln>
@@ -5761,11 +5627,11 @@
             <a:avLst/>
           </a:prstGeom>
           <a:solidFill>
-            <a:srgbClr val="F4F1EA"/>
+            <a:srgbClr val="F4F1EB"/>
           </a:solidFill>
           <a:ln w="12700">
             <a:solidFill>
-              <a:srgbClr val="F4F1EA"/>
+              <a:srgbClr val="F4F1EB"/>
             </a:solidFill>
             <a:prstDash val="solid"/>
           </a:ln>
@@ -5866,11 +5732,11 @@
             <a:avLst/>
           </a:prstGeom>
           <a:solidFill>
-            <a:srgbClr val="F4F1EA"/>
+            <a:srgbClr val="F4F1EB"/>
           </a:solidFill>
           <a:ln w="12700">
             <a:solidFill>
-              <a:srgbClr val="F4F1EA"/>
+              <a:srgbClr val="F4F1EB"/>
             </a:solidFill>
             <a:prstDash val="solid"/>
           </a:ln>
@@ -5971,11 +5837,11 @@
             <a:avLst/>
           </a:prstGeom>
           <a:solidFill>
-            <a:srgbClr val="F4F1EA"/>
+            <a:srgbClr val="F4F1EB"/>
           </a:solidFill>
           <a:ln w="12700">
             <a:solidFill>
-              <a:srgbClr val="F4F1EA"/>
+              <a:srgbClr val="F4F1EB"/>
             </a:solidFill>
             <a:prstDash val="solid"/>
           </a:ln>
@@ -6076,11 +5942,11 @@
             <a:avLst/>
           </a:prstGeom>
           <a:solidFill>
-            <a:srgbClr val="F4F1EA"/>
+            <a:srgbClr val="F4F1EB"/>
           </a:solidFill>
           <a:ln w="12700">
             <a:solidFill>
-              <a:srgbClr val="F4F1EA"/>
+              <a:srgbClr val="F4F1EB"/>
             </a:solidFill>
             <a:prstDash val="solid"/>
           </a:ln>
@@ -6168,6 +6034,36 @@
       </p:sp>
       <p:sp>
         <p:nvSpPr>
+          <p:cNvPr id="19" name="Text 0"/>
+          <p:cNvSpPr/>
+          <p:nvPr>
+            <p:ph idx="101" type="title" hasCustomPrompt="1"/>
+          </p:nvPr>
+        </p:nvSpPr>
+        <p:spPr>
+          <a:xfrm>
+            <a:off x="457200" y="420624"/>
+            <a:ext cx="8229600" cy="731520"/>
+          </a:xfrm>
+          <a:prstGeom prst="rect">
+            <a:avLst/>
+          </a:prstGeom>
+          <a:noFill/>
+          <a:ln/>
+        </p:spPr>
+        <p:txBody>
+          <a:bodyPr wrap="square" lIns="0" tIns="0" rIns="0" bIns="0" rtlCol="0" anchor="t"/>
+          <a:lstStyle/>
+          <a:p>
+            <a:pPr algn="r" indent="0" marL="0">
+              <a:buNone/>
+            </a:pPr>
+            <a:endParaRPr lang="en-US" sz="2600" dirty="0"/>
+          </a:p>
+        </p:txBody>
+      </p:sp>
+      <p:sp>
+        <p:nvSpPr>
           <p:cNvPr id="25" name="Slide Number Placeholder 0"/>
           <p:cNvSpPr>
             <a:spLocks noGrp="1"/>
@@ -6196,7 +6092,7 @@
             <a:lvl1pPr>
               <a:defRPr sz="900">
                 <a:solidFill>
-                  <a:srgbClr val="6B6F76"/>
+                  <a:srgbClr val="6E7B88"/>
                 </a:solidFill>
               </a:defRPr>
             </a:lvl1pPr>
@@ -6238,16 +6134,14 @@
       </p:grpSpPr>
       <p:sp>
         <p:nvSpPr>
-          <p:cNvPr id="2" name="Text 3"/>
-          <p:cNvSpPr/>
-          <p:nvPr>
-            <p:ph idx="103" type="title" hasCustomPrompt="1"/>
-          </p:nvPr>
-        </p:nvSpPr>
-        <p:spPr>
-          <a:xfrm>
-            <a:off x="457200" y="347472"/>
-            <a:ext cx="8229600" cy="685800"/>
+          <p:cNvPr id="2" name="Text 0"/>
+          <p:cNvSpPr txBox="1"/>
+          <p:nvPr/>
+        </p:nvSpPr>
+        <p:spPr>
+          <a:xfrm>
+            <a:off x="457200" y="402336"/>
+            <a:ext cx="8229600" cy="749808"/>
           </a:xfrm>
           <a:prstGeom prst="rect">
             <a:avLst/>
@@ -6256,21 +6150,24 @@
           <a:ln/>
         </p:spPr>
         <p:txBody>
-          <a:bodyPr wrap="square" lIns="0" tIns="0" rIns="0" bIns="0" rtlCol="0" anchor="ctr"/>
+          <a:bodyPr wrap="square" lIns="0" tIns="0" rIns="0" bIns="0" rtlCol="0" anchor="t"/>
           <a:lstStyle/>
           <a:p>
             <a:pPr rtl="1" algn="r" indent="0" marL="0">
               <a:buNone/>
             </a:pPr>
             <a:r>
-              <a:rPr lang="en-US" sz="2600" b="1" dirty="0">
-                <a:solidFill>
-                  <a:srgbClr val="0B0B0B"/>
-                </a:solidFill>
+              <a:rPr lang="ar-AE" altLang="en-US" sz="2600" b="1" dirty="0">
+                <a:solidFill>
+                  <a:schemeClr val="tx1"/>
+                </a:solidFill>
+                <a:latin typeface="Cambria" pitchFamily="34" charset="0"/>
+                <a:ea typeface="Cambria" pitchFamily="34" charset="-122"/>
+                <a:cs typeface="Cambria" pitchFamily="34" charset="-120"/>
               </a:rPr>
               <a:t>ما بعد الوصية: علاقة قانونية مدى الحياة</a:t>
             </a:r>
-            <a:endParaRPr lang="en-US" sz="2600" dirty="0"/>
+            <a:endParaRPr lang="ar-AE" sz="2600" dirty="0"/>
           </a:p>
         </p:txBody>
       </p:sp>
@@ -6325,11 +6222,11 @@
             <a:avLst/>
           </a:prstGeom>
           <a:solidFill>
-            <a:srgbClr val="0B0B0B"/>
+            <a:srgbClr val="0E2238"/>
           </a:solidFill>
           <a:ln w="12700">
             <a:solidFill>
-              <a:srgbClr val="0B0B0B"/>
+              <a:srgbClr val="0E2238"/>
             </a:solidFill>
             <a:prstDash val="solid"/>
           </a:ln>
@@ -6368,7 +6265,7 @@
         <p:spPr>
           <a:xfrm>
             <a:off x="5715000" y="2103120"/>
-            <a:ext cx="2651760" cy="914400"/>
+            <a:ext cx="2651760" cy="713232"/>
           </a:xfrm>
           <a:prstGeom prst="rect">
             <a:avLst/>
@@ -6406,8 +6303,8 @@
         </p:nvSpPr>
         <p:spPr>
           <a:xfrm>
-            <a:off x="5715000" y="3017520"/>
-            <a:ext cx="2651760" cy="1280160"/>
+            <a:off x="5715000" y="2862072"/>
+            <a:ext cx="2651760" cy="1481328"/>
           </a:xfrm>
           <a:prstGeom prst="rect">
             <a:avLst/>
@@ -6423,14 +6320,14 @@
               <a:buNone/>
             </a:pPr>
             <a:r>
-              <a:rPr lang="ar-AE" altLang="en-US" sz="1150" dirty="0">
+              <a:rPr lang="ar-AE" altLang="en-US" sz="1100" dirty="0">
                 <a:solidFill>
                   <a:schemeClr val="bg2"/>
                 </a:solidFill>
               </a:rPr>
               <a:t>فريق واحد يعرف وضعك وأصولك، ويرافقك في كل خطوة استثمارية أو عائلية قادمة.</a:t>
             </a:r>
-            <a:endParaRPr lang="ar-AE" sz="1150" dirty="0"/>
+            <a:endParaRPr lang="ar-AE" sz="1100" dirty="0"/>
           </a:p>
         </p:txBody>
       </p:sp>
@@ -6543,6 +6440,36 @@
               <a:t>تمثيلك في أي نزاع أمام المحاكم والتحكيم</a:t>
             </a:r>
             <a:endParaRPr lang="ar-AE" sz="1250" dirty="0"/>
+          </a:p>
+        </p:txBody>
+      </p:sp>
+      <p:sp>
+        <p:nvSpPr>
+          <p:cNvPr id="9" name="Text 0"/>
+          <p:cNvSpPr/>
+          <p:nvPr>
+            <p:ph idx="101" type="title" hasCustomPrompt="1"/>
+          </p:nvPr>
+        </p:nvSpPr>
+        <p:spPr>
+          <a:xfrm>
+            <a:off x="457200" y="420624"/>
+            <a:ext cx="8229600" cy="731520"/>
+          </a:xfrm>
+          <a:prstGeom prst="rect">
+            <a:avLst/>
+          </a:prstGeom>
+          <a:noFill/>
+          <a:ln/>
+        </p:spPr>
+        <p:txBody>
+          <a:bodyPr wrap="square" lIns="0" tIns="0" rIns="0" bIns="0" rtlCol="0" anchor="t"/>
+          <a:lstStyle/>
+          <a:p>
+            <a:pPr algn="r" indent="0" marL="0">
+              <a:buNone/>
+            </a:pPr>
+            <a:endParaRPr lang="en-US" sz="2600" dirty="0"/>
           </a:p>
         </p:txBody>
       </p:sp>
@@ -6576,7 +6503,7 @@
             <a:lvl1pPr>
               <a:defRPr sz="900">
                 <a:solidFill>
-                  <a:srgbClr val="6B6F76"/>
+                  <a:srgbClr val="6E7B88"/>
                 </a:solidFill>
               </a:defRPr>
             </a:lvl1pPr>
@@ -6632,7 +6559,7 @@
           </a:prstGeom>
           <a:ln w="9525">
             <a:solidFill>
-              <a:srgbClr val="B08D57"/>
+              <a:srgbClr val="B5723B"/>
             </a:solidFill>
             <a:prstDash val="solid"/>
           </a:ln>
@@ -6782,7 +6709,7 @@
             <a:lvl1pPr>
               <a:defRPr sz="900">
                 <a:solidFill>
-                  <a:srgbClr val="D8C39A"/>
+                  <a:srgbClr val="D9B38C"/>
                 </a:solidFill>
               </a:defRPr>
             </a:lvl1pPr>
@@ -6838,7 +6765,7 @@
           </a:prstGeom>
           <a:ln w="9525">
             <a:solidFill>
-              <a:srgbClr val="B08D57"/>
+              <a:srgbClr val="B5723B"/>
             </a:solidFill>
             <a:prstDash val="solid"/>
           </a:ln>
@@ -7161,42 +7088,6 @@
       </p:sp>
       <p:sp>
         <p:nvSpPr>
-          <p:cNvPr id="13" name="Text 7"/>
-          <p:cNvSpPr txBox="1"/>
-          <p:nvPr/>
-        </p:nvSpPr>
-        <p:spPr>
-          <a:xfrm>
-            <a:off x="868680" y="4206240"/>
-            <a:ext cx="7406640" cy="365760"/>
-          </a:xfrm>
-          <a:prstGeom prst="rect">
-            <a:avLst/>
-          </a:prstGeom>
-          <a:noFill/>
-          <a:ln/>
-        </p:spPr>
-        <p:txBody>
-          <a:bodyPr wrap="square" lIns="0" tIns="0" rIns="0" bIns="0" rtlCol="0" anchor="ctr"/>
-          <a:lstStyle/>
-          <a:p>
-            <a:pPr rtl="1" algn="r" indent="0" marL="0">
-              <a:buNone/>
-            </a:pPr>
-            <a:r>
-              <a:rPr lang="ar-AE" altLang="en-US" sz="1000" dirty="0">
-                <a:solidFill>
-                  <a:schemeClr val="accent1"/>
-                </a:solidFill>
-              </a:rPr>
-              <a:t>راشد الكيتوب للمحاماة والاستشارات القانونية</a:t>
-            </a:r>
-            <a:endParaRPr lang="ar-AE" sz="1000" dirty="0"/>
-          </a:p>
-        </p:txBody>
-      </p:sp>
-      <p:sp>
-        <p:nvSpPr>
           <p:cNvPr id="25" name="Slide Number Placeholder 0"/>
           <p:cNvSpPr>
             <a:spLocks noGrp="1"/>
@@ -7225,7 +7116,7 @@
             <a:lvl1pPr>
               <a:defRPr sz="900">
                 <a:solidFill>
-                  <a:srgbClr val="D8C39A"/>
+                  <a:srgbClr val="D9B38C"/>
                 </a:solidFill>
               </a:defRPr>
             </a:lvl1pPr>
@@ -7267,16 +7158,14 @@
       </p:grpSpPr>
       <p:sp>
         <p:nvSpPr>
-          <p:cNvPr id="2" name="Text 3"/>
-          <p:cNvSpPr/>
-          <p:nvPr>
-            <p:ph idx="103" type="title" hasCustomPrompt="1"/>
-          </p:nvPr>
-        </p:nvSpPr>
-        <p:spPr>
-          <a:xfrm>
-            <a:off x="457200" y="347472"/>
-            <a:ext cx="8229600" cy="685800"/>
+          <p:cNvPr id="2" name="Text 0"/>
+          <p:cNvSpPr txBox="1"/>
+          <p:nvPr/>
+        </p:nvSpPr>
+        <p:spPr>
+          <a:xfrm>
+            <a:off x="457200" y="402336"/>
+            <a:ext cx="8229600" cy="749808"/>
           </a:xfrm>
           <a:prstGeom prst="rect">
             <a:avLst/>
@@ -7285,21 +7174,24 @@
           <a:ln/>
         </p:spPr>
         <p:txBody>
-          <a:bodyPr wrap="square" lIns="0" tIns="0" rIns="0" bIns="0" rtlCol="0" anchor="ctr"/>
+          <a:bodyPr wrap="square" lIns="0" tIns="0" rIns="0" bIns="0" rtlCol="0" anchor="t"/>
           <a:lstStyle/>
           <a:p>
             <a:pPr rtl="1" algn="r" indent="0" marL="0">
               <a:buNone/>
             </a:pPr>
             <a:r>
-              <a:rPr lang="en-US" sz="2600" b="1" dirty="0">
-                <a:solidFill>
-                  <a:srgbClr val="0B0B0B"/>
-                </a:solidFill>
+              <a:rPr lang="ar-AE" altLang="en-US" sz="2600" b="1" dirty="0">
+                <a:solidFill>
+                  <a:schemeClr val="tx1"/>
+                </a:solidFill>
+                <a:latin typeface="Cambria" pitchFamily="34" charset="0"/>
+                <a:ea typeface="Cambria" pitchFamily="34" charset="-122"/>
+                <a:cs typeface="Cambria" pitchFamily="34" charset="-120"/>
               </a:rPr>
               <a:t>أهلاً بك</a:t>
             </a:r>
-            <a:endParaRPr lang="en-US" sz="2600" dirty="0"/>
+            <a:endParaRPr lang="ar-AE" sz="2600" dirty="0"/>
           </a:p>
         </p:txBody>
       </p:sp>
@@ -7354,11 +7246,11 @@
             <a:avLst/>
           </a:prstGeom>
           <a:solidFill>
-            <a:srgbClr val="0B0B0B"/>
+            <a:srgbClr val="0E2238"/>
           </a:solidFill>
           <a:ln w="12700">
             <a:solidFill>
-              <a:srgbClr val="0B0B0B"/>
+              <a:srgbClr val="0E2238"/>
             </a:solidFill>
             <a:prstDash val="solid"/>
           </a:ln>
@@ -7397,7 +7289,7 @@
         <p:spPr>
           <a:xfrm>
             <a:off x="5715000" y="2103120"/>
-            <a:ext cx="2651760" cy="914400"/>
+            <a:ext cx="2651760" cy="1014984"/>
           </a:xfrm>
           <a:prstGeom prst="rect">
             <a:avLst/>
@@ -7435,8 +7327,8 @@
         </p:nvSpPr>
         <p:spPr>
           <a:xfrm>
-            <a:off x="5715000" y="3017520"/>
-            <a:ext cx="2651760" cy="1280160"/>
+            <a:off x="5715000" y="3163824"/>
+            <a:ext cx="2651760" cy="1179576"/>
           </a:xfrm>
           <a:prstGeom prst="rect">
             <a:avLst/>
@@ -7452,14 +7344,14 @@
               <a:buNone/>
             </a:pPr>
             <a:r>
-              <a:rPr lang="ar-AE" altLang="en-US" sz="1150" dirty="0">
+              <a:rPr lang="ar-AE" altLang="en-US" sz="1100" dirty="0">
                 <a:solidFill>
                   <a:schemeClr val="bg2"/>
                 </a:solidFill>
               </a:rPr>
               <a:t>فريقنا متخصص في الوصايا والتخطيط للتركات وحماية الأصول للمستثمرين الأجانب ومالكي العقارات في الإمارات.</a:t>
             </a:r>
-            <a:endParaRPr lang="ar-AE" sz="1150" dirty="0"/>
+            <a:endParaRPr lang="ar-AE" sz="1100" dirty="0"/>
           </a:p>
         </p:txBody>
       </p:sp>
@@ -7584,6 +7476,36 @@
               <a:t>العربية، الإنجليزية، الصينية، الروسية.</a:t>
             </a:r>
             <a:endParaRPr lang="ar-AE" sz="1300" dirty="0"/>
+          </a:p>
+        </p:txBody>
+      </p:sp>
+      <p:sp>
+        <p:nvSpPr>
+          <p:cNvPr id="9" name="Text 0"/>
+          <p:cNvSpPr/>
+          <p:nvPr>
+            <p:ph idx="101" type="title" hasCustomPrompt="1"/>
+          </p:nvPr>
+        </p:nvSpPr>
+        <p:spPr>
+          <a:xfrm>
+            <a:off x="457200" y="420624"/>
+            <a:ext cx="8229600" cy="731520"/>
+          </a:xfrm>
+          <a:prstGeom prst="rect">
+            <a:avLst/>
+          </a:prstGeom>
+          <a:noFill/>
+          <a:ln/>
+        </p:spPr>
+        <p:txBody>
+          <a:bodyPr wrap="square" lIns="0" tIns="0" rIns="0" bIns="0" rtlCol="0" anchor="t"/>
+          <a:lstStyle/>
+          <a:p>
+            <a:pPr algn="r" indent="0" marL="0">
+              <a:buNone/>
+            </a:pPr>
+            <a:endParaRPr lang="en-US" sz="2600" dirty="0"/>
           </a:p>
         </p:txBody>
       </p:sp>
@@ -7617,7 +7539,7 @@
             <a:lvl1pPr>
               <a:defRPr sz="900">
                 <a:solidFill>
-                  <a:srgbClr val="6B6F76"/>
+                  <a:srgbClr val="6E7B88"/>
                 </a:solidFill>
               </a:defRPr>
             </a:lvl1pPr>
@@ -7659,16 +7581,14 @@
       </p:grpSpPr>
       <p:sp>
         <p:nvSpPr>
-          <p:cNvPr id="2" name="Text 3"/>
-          <p:cNvSpPr/>
-          <p:nvPr>
-            <p:ph idx="103" type="title" hasCustomPrompt="1"/>
-          </p:nvPr>
-        </p:nvSpPr>
-        <p:spPr>
-          <a:xfrm>
-            <a:off x="457200" y="347472"/>
-            <a:ext cx="8229600" cy="685800"/>
+          <p:cNvPr id="2" name="Text 0"/>
+          <p:cNvSpPr txBox="1"/>
+          <p:nvPr/>
+        </p:nvSpPr>
+        <p:spPr>
+          <a:xfrm>
+            <a:off x="457200" y="402336"/>
+            <a:ext cx="8229600" cy="749808"/>
           </a:xfrm>
           <a:prstGeom prst="rect">
             <a:avLst/>
@@ -7677,21 +7597,24 @@
           <a:ln/>
         </p:spPr>
         <p:txBody>
-          <a:bodyPr wrap="square" lIns="0" tIns="0" rIns="0" bIns="0" rtlCol="0" anchor="ctr"/>
+          <a:bodyPr wrap="square" lIns="0" tIns="0" rIns="0" bIns="0" rtlCol="0" anchor="t"/>
           <a:lstStyle/>
           <a:p>
             <a:pPr rtl="1" algn="r" indent="0" marL="0">
               <a:buNone/>
             </a:pPr>
             <a:r>
-              <a:rPr lang="en-US" sz="2600" b="1" dirty="0">
-                <a:solidFill>
-                  <a:srgbClr val="0B0B0B"/>
-                </a:solidFill>
+              <a:rPr lang="ar-AE" altLang="en-US" sz="2600" b="1" dirty="0">
+                <a:solidFill>
+                  <a:schemeClr val="tx1"/>
+                </a:solidFill>
+                <a:latin typeface="Cambria" pitchFamily="34" charset="0"/>
+                <a:ea typeface="Cambria" pitchFamily="34" charset="-122"/>
+                <a:cs typeface="Cambria" pitchFamily="34" charset="-120"/>
               </a:rPr>
               <a:t>من نحن</a:t>
             </a:r>
-            <a:endParaRPr lang="en-US" sz="2600" dirty="0"/>
+            <a:endParaRPr lang="ar-AE" sz="2600" dirty="0"/>
           </a:p>
         </p:txBody>
       </p:sp>
@@ -7746,11 +7669,11 @@
             <a:avLst/>
           </a:prstGeom>
           <a:solidFill>
-            <a:srgbClr val="F4F1EA"/>
+            <a:srgbClr val="F4F1EB"/>
           </a:solidFill>
           <a:ln w="12700">
             <a:solidFill>
-              <a:srgbClr val="F4F1EA"/>
+              <a:srgbClr val="F4F1EB"/>
             </a:solidFill>
             <a:prstDash val="solid"/>
           </a:ln>
@@ -7851,11 +7774,11 @@
             <a:avLst/>
           </a:prstGeom>
           <a:solidFill>
-            <a:srgbClr val="F4F1EA"/>
+            <a:srgbClr val="F4F1EB"/>
           </a:solidFill>
           <a:ln w="12700">
             <a:solidFill>
-              <a:srgbClr val="F4F1EA"/>
+              <a:srgbClr val="F4F1EB"/>
             </a:solidFill>
             <a:prstDash val="solid"/>
           </a:ln>
@@ -7956,11 +7879,11 @@
             <a:avLst/>
           </a:prstGeom>
           <a:solidFill>
-            <a:srgbClr val="F4F1EA"/>
+            <a:srgbClr val="F4F1EB"/>
           </a:solidFill>
           <a:ln w="12700">
             <a:solidFill>
-              <a:srgbClr val="F4F1EA"/>
+              <a:srgbClr val="F4F1EB"/>
             </a:solidFill>
             <a:prstDash val="solid"/>
           </a:ln>
@@ -8061,11 +7984,11 @@
             <a:avLst/>
           </a:prstGeom>
           <a:solidFill>
-            <a:srgbClr val="F4F1EA"/>
+            <a:srgbClr val="F4F1EB"/>
           </a:solidFill>
           <a:ln w="12700">
             <a:solidFill>
-              <a:srgbClr val="F4F1EA"/>
+              <a:srgbClr val="F4F1EB"/>
             </a:solidFill>
             <a:prstDash val="solid"/>
           </a:ln>
@@ -8166,11 +8089,11 @@
             <a:avLst/>
           </a:prstGeom>
           <a:solidFill>
-            <a:srgbClr val="F4F1EA"/>
+            <a:srgbClr val="F4F1EB"/>
           </a:solidFill>
           <a:ln w="12700">
             <a:solidFill>
-              <a:srgbClr val="F4F1EA"/>
+              <a:srgbClr val="F4F1EB"/>
             </a:solidFill>
             <a:prstDash val="solid"/>
           </a:ln>
@@ -8271,11 +8194,11 @@
             <a:avLst/>
           </a:prstGeom>
           <a:solidFill>
-            <a:srgbClr val="F4F1EA"/>
+            <a:srgbClr val="F4F1EB"/>
           </a:solidFill>
           <a:ln w="12700">
             <a:solidFill>
-              <a:srgbClr val="F4F1EA"/>
+              <a:srgbClr val="F4F1EB"/>
             </a:solidFill>
             <a:prstDash val="solid"/>
           </a:ln>
@@ -8363,6 +8286,36 @@
       </p:sp>
       <p:sp>
         <p:nvSpPr>
+          <p:cNvPr id="22" name="Text 0"/>
+          <p:cNvSpPr/>
+          <p:nvPr>
+            <p:ph idx="101" type="title" hasCustomPrompt="1"/>
+          </p:nvPr>
+        </p:nvSpPr>
+        <p:spPr>
+          <a:xfrm>
+            <a:off x="457200" y="420624"/>
+            <a:ext cx="8229600" cy="731520"/>
+          </a:xfrm>
+          <a:prstGeom prst="rect">
+            <a:avLst/>
+          </a:prstGeom>
+          <a:noFill/>
+          <a:ln/>
+        </p:spPr>
+        <p:txBody>
+          <a:bodyPr wrap="square" lIns="0" tIns="0" rIns="0" bIns="0" rtlCol="0" anchor="t"/>
+          <a:lstStyle/>
+          <a:p>
+            <a:pPr algn="r" indent="0" marL="0">
+              <a:buNone/>
+            </a:pPr>
+            <a:endParaRPr lang="en-US" sz="2600" dirty="0"/>
+          </a:p>
+        </p:txBody>
+      </p:sp>
+      <p:sp>
+        <p:nvSpPr>
           <p:cNvPr id="25" name="Slide Number Placeholder 0"/>
           <p:cNvSpPr>
             <a:spLocks noGrp="1"/>
@@ -8391,7 +8344,7 @@
             <a:lvl1pPr>
               <a:defRPr sz="900">
                 <a:solidFill>
-                  <a:srgbClr val="6B6F76"/>
+                  <a:srgbClr val="6E7B88"/>
                 </a:solidFill>
               </a:defRPr>
             </a:lvl1pPr>
@@ -8433,16 +8386,14 @@
       </p:grpSpPr>
       <p:sp>
         <p:nvSpPr>
-          <p:cNvPr id="2" name="Text 3"/>
-          <p:cNvSpPr/>
-          <p:nvPr>
-            <p:ph idx="103" type="title" hasCustomPrompt="1"/>
-          </p:nvPr>
-        </p:nvSpPr>
-        <p:spPr>
-          <a:xfrm>
-            <a:off x="457200" y="347472"/>
-            <a:ext cx="8229600" cy="685800"/>
+          <p:cNvPr id="2" name="Text 0"/>
+          <p:cNvSpPr txBox="1"/>
+          <p:nvPr/>
+        </p:nvSpPr>
+        <p:spPr>
+          <a:xfrm>
+            <a:off x="457200" y="402336"/>
+            <a:ext cx="8229600" cy="749808"/>
           </a:xfrm>
           <a:prstGeom prst="rect">
             <a:avLst/>
@@ -8451,21 +8402,24 @@
           <a:ln/>
         </p:spPr>
         <p:txBody>
-          <a:bodyPr wrap="square" lIns="0" tIns="0" rIns="0" bIns="0" rtlCol="0" anchor="ctr"/>
+          <a:bodyPr wrap="square" lIns="0" tIns="0" rIns="0" bIns="0" rtlCol="0" anchor="t"/>
           <a:lstStyle/>
           <a:p>
             <a:pPr rtl="1" algn="r" indent="0" marL="0">
               <a:buNone/>
             </a:pPr>
             <a:r>
-              <a:rPr lang="en-US" sz="2600" b="1" dirty="0">
-                <a:solidFill>
-                  <a:srgbClr val="0B0B0B"/>
-                </a:solidFill>
+              <a:rPr lang="ar-AE" altLang="en-US" sz="2600" b="1" dirty="0">
+                <a:solidFill>
+                  <a:schemeClr val="tx1"/>
+                </a:solidFill>
+                <a:latin typeface="Cambria" pitchFamily="34" charset="0"/>
+                <a:ea typeface="Cambria" pitchFamily="34" charset="-122"/>
+                <a:cs typeface="Cambria" pitchFamily="34" charset="-120"/>
               </a:rPr>
               <a:t>لماذا هذا الموضوع مهم لك</a:t>
             </a:r>
-            <a:endParaRPr lang="en-US" sz="2600" dirty="0"/>
+            <a:endParaRPr lang="ar-AE" sz="2600" dirty="0"/>
           </a:p>
         </p:txBody>
       </p:sp>
@@ -8520,11 +8474,11 @@
             <a:avLst/>
           </a:prstGeom>
           <a:solidFill>
-            <a:srgbClr val="F4F1EA"/>
+            <a:srgbClr val="F4F1EB"/>
           </a:solidFill>
           <a:ln w="12700">
             <a:solidFill>
-              <a:srgbClr val="F4F1EA"/>
+              <a:srgbClr val="F4F1EB"/>
             </a:solidFill>
             <a:prstDash val="solid"/>
           </a:ln>
@@ -8625,11 +8579,11 @@
             <a:avLst/>
           </a:prstGeom>
           <a:solidFill>
-            <a:srgbClr val="F4F1EA"/>
+            <a:srgbClr val="F4F1EB"/>
           </a:solidFill>
           <a:ln w="12700">
             <a:solidFill>
-              <a:srgbClr val="F4F1EA"/>
+              <a:srgbClr val="F4F1EB"/>
             </a:solidFill>
             <a:prstDash val="solid"/>
           </a:ln>
@@ -8730,11 +8684,11 @@
             <a:avLst/>
           </a:prstGeom>
           <a:solidFill>
-            <a:srgbClr val="F4F1EA"/>
+            <a:srgbClr val="F4F1EB"/>
           </a:solidFill>
           <a:ln w="12700">
             <a:solidFill>
-              <a:srgbClr val="F4F1EA"/>
+              <a:srgbClr val="F4F1EB"/>
             </a:solidFill>
             <a:prstDash val="solid"/>
           </a:ln>
@@ -8835,11 +8789,11 @@
             <a:avLst/>
           </a:prstGeom>
           <a:solidFill>
-            <a:srgbClr val="F4F1EA"/>
+            <a:srgbClr val="F4F1EB"/>
           </a:solidFill>
           <a:ln w="12700">
             <a:solidFill>
-              <a:srgbClr val="F4F1EA"/>
+              <a:srgbClr val="F4F1EB"/>
             </a:solidFill>
             <a:prstDash val="solid"/>
           </a:ln>
@@ -8940,11 +8894,11 @@
             <a:avLst/>
           </a:prstGeom>
           <a:solidFill>
-            <a:srgbClr val="0B0B0B"/>
+            <a:srgbClr val="0E2238"/>
           </a:solidFill>
           <a:ln w="12700">
             <a:solidFill>
-              <a:srgbClr val="0B0B0B"/>
+              <a:srgbClr val="0E2238"/>
             </a:solidFill>
             <a:prstDash val="solid"/>
           </a:ln>
@@ -8966,7 +8920,7 @@
           </a:prstGeom>
           <a:ln w="9525">
             <a:solidFill>
-              <a:srgbClr val="B08D57"/>
+              <a:srgbClr val="B5723B"/>
             </a:solidFill>
             <a:prstDash val="solid"/>
           </a:ln>
@@ -9044,6 +8998,36 @@
               <a:t>ترتيب بسيط اليوم يحمي استثمارك وعائلتك، ويجعل الإجراءات أسهل والملفات جاهزة.</a:t>
             </a:r>
             <a:endParaRPr lang="ar-AE" sz="1150" dirty="0"/>
+          </a:p>
+        </p:txBody>
+      </p:sp>
+      <p:sp>
+        <p:nvSpPr>
+          <p:cNvPr id="20" name="Text 0"/>
+          <p:cNvSpPr/>
+          <p:nvPr>
+            <p:ph idx="101" type="title" hasCustomPrompt="1"/>
+          </p:nvPr>
+        </p:nvSpPr>
+        <p:spPr>
+          <a:xfrm>
+            <a:off x="457200" y="420624"/>
+            <a:ext cx="8229600" cy="731520"/>
+          </a:xfrm>
+          <a:prstGeom prst="rect">
+            <a:avLst/>
+          </a:prstGeom>
+          <a:noFill/>
+          <a:ln/>
+        </p:spPr>
+        <p:txBody>
+          <a:bodyPr wrap="square" lIns="0" tIns="0" rIns="0" bIns="0" rtlCol="0" anchor="t"/>
+          <a:lstStyle/>
+          <a:p>
+            <a:pPr algn="r" indent="0" marL="0">
+              <a:buNone/>
+            </a:pPr>
+            <a:endParaRPr lang="en-US" sz="2600" dirty="0"/>
           </a:p>
         </p:txBody>
       </p:sp>
@@ -9077,7 +9061,7 @@
             <a:lvl1pPr>
               <a:defRPr sz="900">
                 <a:solidFill>
-                  <a:srgbClr val="6B6F76"/>
+                  <a:srgbClr val="6E7B88"/>
                 </a:solidFill>
               </a:defRPr>
             </a:lvl1pPr>
@@ -9119,16 +9103,14 @@
       </p:grpSpPr>
       <p:sp>
         <p:nvSpPr>
-          <p:cNvPr id="2" name="Text 3"/>
-          <p:cNvSpPr/>
-          <p:nvPr>
-            <p:ph idx="103" type="title" hasCustomPrompt="1"/>
-          </p:nvPr>
-        </p:nvSpPr>
-        <p:spPr>
-          <a:xfrm>
-            <a:off x="457200" y="347472"/>
-            <a:ext cx="8229600" cy="685800"/>
+          <p:cNvPr id="2" name="Text 0"/>
+          <p:cNvSpPr txBox="1"/>
+          <p:nvPr/>
+        </p:nvSpPr>
+        <p:spPr>
+          <a:xfrm>
+            <a:off x="457200" y="402336"/>
+            <a:ext cx="8229600" cy="749808"/>
           </a:xfrm>
           <a:prstGeom prst="rect">
             <a:avLst/>
@@ -9137,21 +9119,24 @@
           <a:ln/>
         </p:spPr>
         <p:txBody>
-          <a:bodyPr wrap="square" lIns="0" tIns="0" rIns="0" bIns="0" rtlCol="0" anchor="ctr"/>
+          <a:bodyPr wrap="square" lIns="0" tIns="0" rIns="0" bIns="0" rtlCol="0" anchor="t"/>
           <a:lstStyle/>
           <a:p>
             <a:pPr rtl="1" algn="r" indent="0" marL="0">
               <a:buNone/>
             </a:pPr>
             <a:r>
-              <a:rPr lang="en-US" sz="2600" b="1" dirty="0">
-                <a:solidFill>
-                  <a:srgbClr val="0B0B0B"/>
-                </a:solidFill>
+              <a:rPr lang="ar-AE" altLang="en-US" sz="2600" b="1" dirty="0">
+                <a:solidFill>
+                  <a:schemeClr val="tx1"/>
+                </a:solidFill>
+                <a:latin typeface="Cambria" pitchFamily="34" charset="0"/>
+                <a:ea typeface="Cambria" pitchFamily="34" charset="-122"/>
+                <a:cs typeface="Cambria" pitchFamily="34" charset="-120"/>
               </a:rPr>
               <a:t>مع التخطيط وبدونه</a:t>
             </a:r>
-            <a:endParaRPr lang="en-US" sz="2600" dirty="0"/>
+            <a:endParaRPr lang="ar-AE" sz="2600" dirty="0"/>
           </a:p>
         </p:txBody>
       </p:sp>
@@ -9206,11 +9191,11 @@
             <a:avLst/>
           </a:prstGeom>
           <a:solidFill>
-            <a:srgbClr val="0B0B0B"/>
+            <a:srgbClr val="0E2238"/>
           </a:solidFill>
           <a:ln w="12700">
             <a:solidFill>
-              <a:srgbClr val="0B0B0B"/>
+              <a:srgbClr val="0E2238"/>
             </a:solidFill>
             <a:prstDash val="solid"/>
           </a:ln>
@@ -9267,11 +9252,11 @@
             <a:avLst/>
           </a:prstGeom>
           <a:solidFill>
-            <a:srgbClr val="F4F1EA"/>
+            <a:srgbClr val="F4F1EB"/>
           </a:solidFill>
           <a:ln w="12700">
             <a:solidFill>
-              <a:srgbClr val="F4F1EA"/>
+              <a:srgbClr val="F4F1EB"/>
             </a:solidFill>
             <a:prstDash val="solid"/>
           </a:ln>
@@ -9404,11 +9389,11 @@
             <a:avLst/>
           </a:prstGeom>
           <a:solidFill>
-            <a:srgbClr val="B08D57"/>
+            <a:srgbClr val="B5723B"/>
           </a:solidFill>
           <a:ln w="12700">
             <a:solidFill>
-              <a:srgbClr val="B08D57"/>
+              <a:srgbClr val="B5723B"/>
             </a:solidFill>
             <a:prstDash val="solid"/>
           </a:ln>
@@ -9465,11 +9450,11 @@
             <a:avLst/>
           </a:prstGeom>
           <a:solidFill>
-            <a:srgbClr val="F4F1EA"/>
+            <a:srgbClr val="F4F1EB"/>
           </a:solidFill>
           <a:ln w="12700">
             <a:solidFill>
-              <a:srgbClr val="F4F1EA"/>
+              <a:srgbClr val="F4F1EB"/>
             </a:solidFill>
             <a:prstDash val="solid"/>
           </a:ln>
@@ -9584,6 +9569,36 @@
               <a:t>راحة بال لك ولعائلتك</a:t>
             </a:r>
             <a:endParaRPr lang="ar-AE" sz="1100" dirty="0"/>
+          </a:p>
+        </p:txBody>
+      </p:sp>
+      <p:sp>
+        <p:nvSpPr>
+          <p:cNvPr id="12" name="Text 0"/>
+          <p:cNvSpPr/>
+          <p:nvPr>
+            <p:ph idx="101" type="title" hasCustomPrompt="1"/>
+          </p:nvPr>
+        </p:nvSpPr>
+        <p:spPr>
+          <a:xfrm>
+            <a:off x="457200" y="420624"/>
+            <a:ext cx="8229600" cy="731520"/>
+          </a:xfrm>
+          <a:prstGeom prst="rect">
+            <a:avLst/>
+          </a:prstGeom>
+          <a:noFill/>
+          <a:ln/>
+        </p:spPr>
+        <p:txBody>
+          <a:bodyPr wrap="square" lIns="0" tIns="0" rIns="0" bIns="0" rtlCol="0" anchor="t"/>
+          <a:lstStyle/>
+          <a:p>
+            <a:pPr algn="r" indent="0" marL="0">
+              <a:buNone/>
+            </a:pPr>
+            <a:endParaRPr lang="en-US" sz="2600" dirty="0"/>
           </a:p>
         </p:txBody>
       </p:sp>
@@ -9617,7 +9632,7 @@
             <a:lvl1pPr>
               <a:defRPr sz="900">
                 <a:solidFill>
-                  <a:srgbClr val="6B6F76"/>
+                  <a:srgbClr val="6E7B88"/>
                 </a:solidFill>
               </a:defRPr>
             </a:lvl1pPr>
@@ -9659,16 +9674,14 @@
       </p:grpSpPr>
       <p:sp>
         <p:nvSpPr>
-          <p:cNvPr id="2" name="Text 3"/>
-          <p:cNvSpPr/>
-          <p:nvPr>
-            <p:ph idx="103" type="title" hasCustomPrompt="1"/>
-          </p:nvPr>
-        </p:nvSpPr>
-        <p:spPr>
-          <a:xfrm>
-            <a:off x="457200" y="347472"/>
-            <a:ext cx="8229600" cy="685800"/>
+          <p:cNvPr id="2" name="Text 0"/>
+          <p:cNvSpPr txBox="1"/>
+          <p:nvPr/>
+        </p:nvSpPr>
+        <p:spPr>
+          <a:xfrm>
+            <a:off x="457200" y="402336"/>
+            <a:ext cx="8229600" cy="749808"/>
           </a:xfrm>
           <a:prstGeom prst="rect">
             <a:avLst/>
@@ -9677,21 +9690,24 @@
           <a:ln/>
         </p:spPr>
         <p:txBody>
-          <a:bodyPr wrap="square" lIns="0" tIns="0" rIns="0" bIns="0" rtlCol="0" anchor="ctr"/>
+          <a:bodyPr wrap="square" lIns="0" tIns="0" rIns="0" bIns="0" rtlCol="0" anchor="t"/>
           <a:lstStyle/>
           <a:p>
             <a:pPr rtl="1" algn="r" indent="0" marL="0">
               <a:buNone/>
             </a:pPr>
             <a:r>
-              <a:rPr lang="en-US" sz="2600" b="1" dirty="0">
-                <a:solidFill>
-                  <a:srgbClr val="0B0B0B"/>
-                </a:solidFill>
+              <a:rPr lang="ar-AE" altLang="en-US" sz="2600" b="1" dirty="0">
+                <a:solidFill>
+                  <a:schemeClr val="tx1"/>
+                </a:solidFill>
+                <a:latin typeface="Cambria" pitchFamily="34" charset="0"/>
+                <a:ea typeface="Cambria" pitchFamily="34" charset="-122"/>
+                <a:cs typeface="Cambria" pitchFamily="34" charset="-120"/>
               </a:rPr>
               <a:t>ما الذي يمكننا حمايته</a:t>
             </a:r>
-            <a:endParaRPr lang="en-US" sz="2600" dirty="0"/>
+            <a:endParaRPr lang="ar-AE" sz="2600" dirty="0"/>
           </a:p>
         </p:txBody>
       </p:sp>
@@ -9746,11 +9762,11 @@
             <a:avLst/>
           </a:prstGeom>
           <a:solidFill>
-            <a:srgbClr val="F4F1EA"/>
+            <a:srgbClr val="F4F1EB"/>
           </a:solidFill>
           <a:ln w="12700">
             <a:solidFill>
-              <a:srgbClr val="F4F1EA"/>
+              <a:srgbClr val="F4F1EB"/>
             </a:solidFill>
             <a:prstDash val="solid"/>
           </a:ln>
@@ -9851,11 +9867,11 @@
             <a:avLst/>
           </a:prstGeom>
           <a:solidFill>
-            <a:srgbClr val="F4F1EA"/>
+            <a:srgbClr val="F4F1EB"/>
           </a:solidFill>
           <a:ln w="12700">
             <a:solidFill>
-              <a:srgbClr val="F4F1EA"/>
+              <a:srgbClr val="F4F1EB"/>
             </a:solidFill>
             <a:prstDash val="solid"/>
           </a:ln>
@@ -9956,11 +9972,11 @@
             <a:avLst/>
           </a:prstGeom>
           <a:solidFill>
-            <a:srgbClr val="F4F1EA"/>
+            <a:srgbClr val="F4F1EB"/>
           </a:solidFill>
           <a:ln w="12700">
             <a:solidFill>
-              <a:srgbClr val="F4F1EA"/>
+              <a:srgbClr val="F4F1EB"/>
             </a:solidFill>
             <a:prstDash val="solid"/>
           </a:ln>
@@ -10061,11 +10077,11 @@
             <a:avLst/>
           </a:prstGeom>
           <a:solidFill>
-            <a:srgbClr val="F4F1EA"/>
+            <a:srgbClr val="F4F1EB"/>
           </a:solidFill>
           <a:ln w="12700">
             <a:solidFill>
-              <a:srgbClr val="F4F1EA"/>
+              <a:srgbClr val="F4F1EB"/>
             </a:solidFill>
             <a:prstDash val="solid"/>
           </a:ln>
@@ -10166,11 +10182,11 @@
             <a:avLst/>
           </a:prstGeom>
           <a:solidFill>
-            <a:srgbClr val="F4F1EA"/>
+            <a:srgbClr val="F4F1EB"/>
           </a:solidFill>
           <a:ln w="12700">
             <a:solidFill>
-              <a:srgbClr val="F4F1EA"/>
+              <a:srgbClr val="F4F1EB"/>
             </a:solidFill>
             <a:prstDash val="solid"/>
           </a:ln>
@@ -10271,11 +10287,11 @@
             <a:avLst/>
           </a:prstGeom>
           <a:solidFill>
-            <a:srgbClr val="F4F1EA"/>
+            <a:srgbClr val="F4F1EB"/>
           </a:solidFill>
           <a:ln w="12700">
             <a:solidFill>
-              <a:srgbClr val="F4F1EA"/>
+              <a:srgbClr val="F4F1EB"/>
             </a:solidFill>
             <a:prstDash val="solid"/>
           </a:ln>
@@ -10363,6 +10379,36 @@
       </p:sp>
       <p:sp>
         <p:nvSpPr>
+          <p:cNvPr id="22" name="Text 0"/>
+          <p:cNvSpPr/>
+          <p:nvPr>
+            <p:ph idx="101" type="title" hasCustomPrompt="1"/>
+          </p:nvPr>
+        </p:nvSpPr>
+        <p:spPr>
+          <a:xfrm>
+            <a:off x="457200" y="420624"/>
+            <a:ext cx="8229600" cy="731520"/>
+          </a:xfrm>
+          <a:prstGeom prst="rect">
+            <a:avLst/>
+          </a:prstGeom>
+          <a:noFill/>
+          <a:ln/>
+        </p:spPr>
+        <p:txBody>
+          <a:bodyPr wrap="square" lIns="0" tIns="0" rIns="0" bIns="0" rtlCol="0" anchor="t"/>
+          <a:lstStyle/>
+          <a:p>
+            <a:pPr algn="r" indent="0" marL="0">
+              <a:buNone/>
+            </a:pPr>
+            <a:endParaRPr lang="en-US" sz="2600" dirty="0"/>
+          </a:p>
+        </p:txBody>
+      </p:sp>
+      <p:sp>
+        <p:nvSpPr>
           <p:cNvPr id="25" name="Slide Number Placeholder 0"/>
           <p:cNvSpPr>
             <a:spLocks noGrp="1"/>
@@ -10391,7 +10437,7 @@
             <a:lvl1pPr>
               <a:defRPr sz="900">
                 <a:solidFill>
-                  <a:srgbClr val="6B6F76"/>
+                  <a:srgbClr val="6E7B88"/>
                 </a:solidFill>
               </a:defRPr>
             </a:lvl1pPr>
@@ -10433,16 +10479,14 @@
       </p:grpSpPr>
       <p:sp>
         <p:nvSpPr>
-          <p:cNvPr id="2" name="Text 3"/>
-          <p:cNvSpPr/>
-          <p:nvPr>
-            <p:ph idx="103" type="title" hasCustomPrompt="1"/>
-          </p:nvPr>
-        </p:nvSpPr>
-        <p:spPr>
-          <a:xfrm>
-            <a:off x="457200" y="347472"/>
-            <a:ext cx="8229600" cy="685800"/>
+          <p:cNvPr id="2" name="Text 0"/>
+          <p:cNvSpPr txBox="1"/>
+          <p:nvPr/>
+        </p:nvSpPr>
+        <p:spPr>
+          <a:xfrm>
+            <a:off x="457200" y="402336"/>
+            <a:ext cx="8229600" cy="749808"/>
           </a:xfrm>
           <a:prstGeom prst="rect">
             <a:avLst/>
@@ -10451,21 +10495,24 @@
           <a:ln/>
         </p:spPr>
         <p:txBody>
-          <a:bodyPr wrap="square" lIns="0" tIns="0" rIns="0" bIns="0" rtlCol="0" anchor="ctr"/>
+          <a:bodyPr wrap="square" lIns="0" tIns="0" rIns="0" bIns="0" rtlCol="0" anchor="t"/>
           <a:lstStyle/>
           <a:p>
             <a:pPr rtl="1" algn="r" indent="0" marL="0">
               <a:buNone/>
             </a:pPr>
             <a:r>
-              <a:rPr lang="en-US" sz="2600" b="1" dirty="0">
-                <a:solidFill>
-                  <a:srgbClr val="0B0B0B"/>
-                </a:solidFill>
+              <a:rPr lang="ar-AE" altLang="en-US" sz="2600" b="1" dirty="0">
+                <a:solidFill>
+                  <a:schemeClr val="tx1"/>
+                </a:solidFill>
+                <a:latin typeface="Cambria" pitchFamily="34" charset="0"/>
+                <a:ea typeface="Cambria" pitchFamily="34" charset="-122"/>
+                <a:cs typeface="Cambria" pitchFamily="34" charset="-120"/>
               </a:rPr>
               <a:t>جهات تسجيل الوصايا في الإمارات</a:t>
             </a:r>
-            <a:endParaRPr lang="en-US" sz="2600" dirty="0"/>
+            <a:endParaRPr lang="ar-AE" sz="2600" dirty="0"/>
           </a:p>
         </p:txBody>
       </p:sp>
@@ -10520,11 +10567,11 @@
             <a:avLst/>
           </a:prstGeom>
           <a:solidFill>
-            <a:srgbClr val="F4F1EA"/>
+            <a:srgbClr val="F4F1EB"/>
           </a:solidFill>
           <a:ln w="12700">
             <a:solidFill>
-              <a:srgbClr val="F4F1EA"/>
+              <a:srgbClr val="F4F1EB"/>
             </a:solidFill>
             <a:prstDash val="solid"/>
           </a:ln>
@@ -10625,11 +10672,11 @@
             <a:avLst/>
           </a:prstGeom>
           <a:solidFill>
-            <a:srgbClr val="F4F1EA"/>
+            <a:srgbClr val="F4F1EB"/>
           </a:solidFill>
           <a:ln w="12700">
             <a:solidFill>
-              <a:srgbClr val="F4F1EA"/>
+              <a:srgbClr val="F4F1EB"/>
             </a:solidFill>
             <a:prstDash val="solid"/>
           </a:ln>
@@ -10730,11 +10777,11 @@
             <a:avLst/>
           </a:prstGeom>
           <a:solidFill>
-            <a:srgbClr val="F4F1EA"/>
+            <a:srgbClr val="F4F1EB"/>
           </a:solidFill>
           <a:ln w="12700">
             <a:solidFill>
-              <a:srgbClr val="F4F1EA"/>
+              <a:srgbClr val="F4F1EB"/>
             </a:solidFill>
             <a:prstDash val="solid"/>
           </a:ln>
@@ -10835,11 +10882,11 @@
             <a:avLst/>
           </a:prstGeom>
           <a:solidFill>
-            <a:srgbClr val="F4F1EA"/>
+            <a:srgbClr val="F4F1EB"/>
           </a:solidFill>
           <a:ln w="12700">
             <a:solidFill>
-              <a:srgbClr val="F4F1EA"/>
+              <a:srgbClr val="F4F1EB"/>
             </a:solidFill>
             <a:prstDash val="solid"/>
           </a:ln>
@@ -10940,11 +10987,11 @@
             <a:avLst/>
           </a:prstGeom>
           <a:solidFill>
-            <a:srgbClr val="F4F1EA"/>
+            <a:srgbClr val="F4F1EB"/>
           </a:solidFill>
           <a:ln w="12700">
             <a:solidFill>
-              <a:srgbClr val="F4F1EA"/>
+              <a:srgbClr val="F4F1EB"/>
             </a:solidFill>
             <a:prstDash val="solid"/>
           </a:ln>
@@ -11045,11 +11092,11 @@
             <a:avLst/>
           </a:prstGeom>
           <a:solidFill>
-            <a:srgbClr val="0B0B0B"/>
+            <a:srgbClr val="0E2238"/>
           </a:solidFill>
           <a:ln w="12700">
             <a:solidFill>
-              <a:srgbClr val="0B0B0B"/>
+              <a:srgbClr val="0E2238"/>
             </a:solidFill>
             <a:prstDash val="solid"/>
           </a:ln>
@@ -11071,7 +11118,7 @@
           </a:prstGeom>
           <a:ln w="9525">
             <a:solidFill>
-              <a:srgbClr val="B08D57"/>
+              <a:srgbClr val="B5723B"/>
             </a:solidFill>
             <a:prstDash val="solid"/>
           </a:ln>
@@ -11149,6 +11196,36 @@
               <a:t>الجنسية، الديانة، الحالة العائلية، وموقع الأصول تحدد المسار الأنسب. لذلك نبدأ دائماً بجلسة اكتشاف لا بنوع الوصية.</a:t>
             </a:r>
             <a:endParaRPr lang="ar-AE" sz="1150" dirty="0"/>
+          </a:p>
+        </p:txBody>
+      </p:sp>
+      <p:sp>
+        <p:nvSpPr>
+          <p:cNvPr id="23" name="Text 0"/>
+          <p:cNvSpPr/>
+          <p:nvPr>
+            <p:ph idx="101" type="title" hasCustomPrompt="1"/>
+          </p:nvPr>
+        </p:nvSpPr>
+        <p:spPr>
+          <a:xfrm>
+            <a:off x="457200" y="420624"/>
+            <a:ext cx="8229600" cy="731520"/>
+          </a:xfrm>
+          <a:prstGeom prst="rect">
+            <a:avLst/>
+          </a:prstGeom>
+          <a:noFill/>
+          <a:ln/>
+        </p:spPr>
+        <p:txBody>
+          <a:bodyPr wrap="square" lIns="0" tIns="0" rIns="0" bIns="0" rtlCol="0" anchor="t"/>
+          <a:lstStyle/>
+          <a:p>
+            <a:pPr algn="r" indent="0" marL="0">
+              <a:buNone/>
+            </a:pPr>
+            <a:endParaRPr lang="en-US" sz="2600" dirty="0"/>
           </a:p>
         </p:txBody>
       </p:sp>
@@ -11182,7 +11259,7 @@
             <a:lvl1pPr>
               <a:defRPr sz="900">
                 <a:solidFill>
-                  <a:srgbClr val="6B6F76"/>
+                  <a:srgbClr val="6E7B88"/>
                 </a:solidFill>
               </a:defRPr>
             </a:lvl1pPr>
@@ -11224,16 +11301,14 @@
       </p:grpSpPr>
       <p:sp>
         <p:nvSpPr>
-          <p:cNvPr id="2" name="Text 3"/>
-          <p:cNvSpPr/>
-          <p:nvPr>
-            <p:ph idx="103" type="title" hasCustomPrompt="1"/>
-          </p:nvPr>
-        </p:nvSpPr>
-        <p:spPr>
-          <a:xfrm>
-            <a:off x="457200" y="347472"/>
-            <a:ext cx="8229600" cy="685800"/>
+          <p:cNvPr id="2" name="Text 0"/>
+          <p:cNvSpPr txBox="1"/>
+          <p:nvPr/>
+        </p:nvSpPr>
+        <p:spPr>
+          <a:xfrm>
+            <a:off x="457200" y="402336"/>
+            <a:ext cx="8229600" cy="749808"/>
           </a:xfrm>
           <a:prstGeom prst="rect">
             <a:avLst/>
@@ -11242,21 +11317,24 @@
           <a:ln/>
         </p:spPr>
         <p:txBody>
-          <a:bodyPr wrap="square" lIns="0" tIns="0" rIns="0" bIns="0" rtlCol="0" anchor="ctr"/>
+          <a:bodyPr wrap="square" lIns="0" tIns="0" rIns="0" bIns="0" rtlCol="0" anchor="t"/>
           <a:lstStyle/>
           <a:p>
             <a:pPr rtl="1" algn="r" indent="0" marL="0">
               <a:buNone/>
             </a:pPr>
             <a:r>
-              <a:rPr lang="en-US" sz="2600" b="1" dirty="0">
-                <a:solidFill>
-                  <a:srgbClr val="0B0B0B"/>
-                </a:solidFill>
+              <a:rPr lang="ar-AE" altLang="en-US" sz="2600" b="1" dirty="0">
+                <a:solidFill>
+                  <a:schemeClr val="tx1"/>
+                </a:solidFill>
+                <a:latin typeface="Cambria" pitchFamily="34" charset="0"/>
+                <a:ea typeface="Cambria" pitchFamily="34" charset="-122"/>
+                <a:cs typeface="Cambria" pitchFamily="34" charset="-120"/>
               </a:rPr>
               <a:t>أنواع الخدمة</a:t>
             </a:r>
-            <a:endParaRPr lang="en-US" sz="2600" dirty="0"/>
+            <a:endParaRPr lang="ar-AE" sz="2600" dirty="0"/>
           </a:p>
         </p:txBody>
       </p:sp>
@@ -11335,7 +11413,7 @@
                       <a:r>
                         <a:rPr lang="en-US" sz="1100" b="1" dirty="0">
                           <a:solidFill>
-                            <a:srgbClr val="D8C39A"/>
+                            <a:srgbClr val="D9B38C"/>
                           </a:solidFill>
                           <a:latin typeface="+mn-lt" pitchFamily="34" charset="0"/>
                           <a:ea typeface="+mn-lt" pitchFamily="34" charset="-122"/>
@@ -11353,7 +11431,7 @@
                   <a:tcPr marL="91440" marR="91440" marT="45720" marB="45720" anchor="ctr">
                     <a:lnL w="6350" cap="flat" cmpd="sng" algn="ctr">
                       <a:solidFill>
-                        <a:srgbClr val="E9E4DA"/>
+                        <a:srgbClr val="E6E1D8"/>
                       </a:solidFill>
                       <a:prstDash val="solid"/>
                       <a:round/>
@@ -11362,7 +11440,7 @@
                     </a:lnL>
                     <a:lnR w="6350" cap="flat" cmpd="sng" algn="ctr">
                       <a:solidFill>
-                        <a:srgbClr val="E9E4DA"/>
+                        <a:srgbClr val="E6E1D8"/>
                       </a:solidFill>
                       <a:prstDash val="solid"/>
                       <a:round/>
@@ -11371,7 +11449,7 @@
                     </a:lnR>
                     <a:lnT w="6350" cap="flat" cmpd="sng" algn="ctr">
                       <a:solidFill>
-                        <a:srgbClr val="E9E4DA"/>
+                        <a:srgbClr val="E6E1D8"/>
                       </a:solidFill>
                       <a:prstDash val="solid"/>
                       <a:round/>
@@ -11380,7 +11458,7 @@
                     </a:lnT>
                     <a:lnB w="6350" cap="flat" cmpd="sng" algn="ctr">
                       <a:solidFill>
-                        <a:srgbClr val="E9E4DA"/>
+                        <a:srgbClr val="E6E1D8"/>
                       </a:solidFill>
                       <a:prstDash val="solid"/>
                       <a:round/>
@@ -11388,7 +11466,7 @@
                       <a:tailEnd type="none" w="med" len="med"/>
                     </a:lnB>
                     <a:solidFill>
-                      <a:srgbClr val="0B0B0B"/>
+                      <a:srgbClr val="0E2238"/>
                     </a:solidFill>
                   </a:tcPr>
                 </a:tc>
@@ -11403,7 +11481,7 @@
                       <a:r>
                         <a:rPr lang="en-US" sz="1100" b="1" dirty="0">
                           <a:solidFill>
-                            <a:srgbClr val="D8C39A"/>
+                            <a:srgbClr val="D9B38C"/>
                           </a:solidFill>
                           <a:latin typeface="+mn-lt" pitchFamily="34" charset="0"/>
                           <a:ea typeface="+mn-lt" pitchFamily="34" charset="-122"/>
@@ -11421,7 +11499,7 @@
                   <a:tcPr marL="91440" marR="91440" marT="45720" marB="45720" anchor="ctr">
                     <a:lnL w="6350" cap="flat" cmpd="sng" algn="ctr">
                       <a:solidFill>
-                        <a:srgbClr val="E9E4DA"/>
+                        <a:srgbClr val="E6E1D8"/>
                       </a:solidFill>
                       <a:prstDash val="solid"/>
                       <a:round/>
@@ -11430,7 +11508,7 @@
                     </a:lnL>
                     <a:lnR w="6350" cap="flat" cmpd="sng" algn="ctr">
                       <a:solidFill>
-                        <a:srgbClr val="E9E4DA"/>
+                        <a:srgbClr val="E6E1D8"/>
                       </a:solidFill>
                       <a:prstDash val="solid"/>
                       <a:round/>
@@ -11439,7 +11517,7 @@
                     </a:lnR>
                     <a:lnT w="6350" cap="flat" cmpd="sng" algn="ctr">
                       <a:solidFill>
-                        <a:srgbClr val="E9E4DA"/>
+                        <a:srgbClr val="E6E1D8"/>
                       </a:solidFill>
                       <a:prstDash val="solid"/>
                       <a:round/>
@@ -11448,7 +11526,7 @@
                     </a:lnT>
                     <a:lnB w="6350" cap="flat" cmpd="sng" algn="ctr">
                       <a:solidFill>
-                        <a:srgbClr val="E9E4DA"/>
+                        <a:srgbClr val="E6E1D8"/>
                       </a:solidFill>
                       <a:prstDash val="solid"/>
                       <a:round/>
@@ -11456,7 +11534,7 @@
                       <a:tailEnd type="none" w="med" len="med"/>
                     </a:lnB>
                     <a:solidFill>
-                      <a:srgbClr val="0B0B0B"/>
+                      <a:srgbClr val="0E2238"/>
                     </a:solidFill>
                   </a:tcPr>
                 </a:tc>
@@ -11471,7 +11549,7 @@
                       <a:r>
                         <a:rPr lang="en-US" sz="1100" b="1" dirty="0">
                           <a:solidFill>
-                            <a:srgbClr val="D8C39A"/>
+                            <a:srgbClr val="D9B38C"/>
                           </a:solidFill>
                           <a:latin typeface="+mn-lt" pitchFamily="34" charset="0"/>
                           <a:ea typeface="+mn-lt" pitchFamily="34" charset="-122"/>
@@ -11489,7 +11567,7 @@
                   <a:tcPr marL="91440" marR="91440" marT="45720" marB="45720" anchor="ctr">
                     <a:lnL w="6350" cap="flat" cmpd="sng" algn="ctr">
                       <a:solidFill>
-                        <a:srgbClr val="E9E4DA"/>
+                        <a:srgbClr val="E6E1D8"/>
                       </a:solidFill>
                       <a:prstDash val="solid"/>
                       <a:round/>
@@ -11498,7 +11576,7 @@
                     </a:lnL>
                     <a:lnR w="6350" cap="flat" cmpd="sng" algn="ctr">
                       <a:solidFill>
-                        <a:srgbClr val="E9E4DA"/>
+                        <a:srgbClr val="E6E1D8"/>
                       </a:solidFill>
                       <a:prstDash val="solid"/>
                       <a:round/>
@@ -11507,7 +11585,7 @@
                     </a:lnR>
                     <a:lnT w="6350" cap="flat" cmpd="sng" algn="ctr">
                       <a:solidFill>
-                        <a:srgbClr val="E9E4DA"/>
+                        <a:srgbClr val="E6E1D8"/>
                       </a:solidFill>
                       <a:prstDash val="solid"/>
                       <a:round/>
@@ -11516,7 +11594,7 @@
                     </a:lnT>
                     <a:lnB w="6350" cap="flat" cmpd="sng" algn="ctr">
                       <a:solidFill>
-                        <a:srgbClr val="E9E4DA"/>
+                        <a:srgbClr val="E6E1D8"/>
                       </a:solidFill>
                       <a:prstDash val="solid"/>
                       <a:round/>
@@ -11524,7 +11602,7 @@
                       <a:tailEnd type="none" w="med" len="med"/>
                     </a:lnB>
                     <a:solidFill>
-                      <a:srgbClr val="0B0B0B"/>
+                      <a:srgbClr val="0E2238"/>
                     </a:solidFill>
                   </a:tcPr>
                 </a:tc>
@@ -11541,7 +11619,7 @@
                       <a:r>
                         <a:rPr lang="en-US" sz="1050" dirty="0">
                           <a:solidFill>
-                            <a:srgbClr val="2A2D33"/>
+                            <a:srgbClr val="1F3A52"/>
                           </a:solidFill>
                           <a:latin typeface="+mn-lt" pitchFamily="34" charset="0"/>
                           <a:ea typeface="+mn-lt" pitchFamily="34" charset="-122"/>
@@ -11559,7 +11637,7 @@
                   <a:tcPr marL="91440" marR="91440" marT="45720" marB="45720" anchor="ctr">
                     <a:lnL w="6350" cap="flat" cmpd="sng" algn="ctr">
                       <a:solidFill>
-                        <a:srgbClr val="E9E4DA"/>
+                        <a:srgbClr val="E6E1D8"/>
                       </a:solidFill>
                       <a:prstDash val="solid"/>
                       <a:round/>
@@ -11568,7 +11646,7 @@
                     </a:lnL>
                     <a:lnR w="6350" cap="flat" cmpd="sng" algn="ctr">
                       <a:solidFill>
-                        <a:srgbClr val="E9E4DA"/>
+                        <a:srgbClr val="E6E1D8"/>
                       </a:solidFill>
                       <a:prstDash val="solid"/>
                       <a:round/>
@@ -11577,7 +11655,7 @@
                     </a:lnR>
                     <a:lnT w="6350" cap="flat" cmpd="sng" algn="ctr">
                       <a:solidFill>
-                        <a:srgbClr val="E9E4DA"/>
+                        <a:srgbClr val="E6E1D8"/>
                       </a:solidFill>
                       <a:prstDash val="solid"/>
                       <a:round/>
@@ -11586,7 +11664,7 @@
                     </a:lnT>
                     <a:lnB w="6350" cap="flat" cmpd="sng" algn="ctr">
                       <a:solidFill>
-                        <a:srgbClr val="E9E4DA"/>
+                        <a:srgbClr val="E6E1D8"/>
                       </a:solidFill>
                       <a:prstDash val="solid"/>
                       <a:round/>
@@ -11594,7 +11672,7 @@
                       <a:tailEnd type="none" w="med" len="med"/>
                     </a:lnB>
                     <a:solidFill>
-                      <a:srgbClr val="F4F1EA"/>
+                      <a:srgbClr val="F4F1EB"/>
                     </a:solidFill>
                   </a:tcPr>
                 </a:tc>
@@ -11609,7 +11687,7 @@
                       <a:r>
                         <a:rPr lang="en-US" sz="1050" dirty="0">
                           <a:solidFill>
-                            <a:srgbClr val="2A2D33"/>
+                            <a:srgbClr val="1F3A52"/>
                           </a:solidFill>
                           <a:latin typeface="+mn-lt" pitchFamily="34" charset="0"/>
                           <a:ea typeface="+mn-lt" pitchFamily="34" charset="-122"/>
@@ -11627,7 +11705,7 @@
                   <a:tcPr marL="91440" marR="91440" marT="45720" marB="45720" anchor="ctr">
                     <a:lnL w="6350" cap="flat" cmpd="sng" algn="ctr">
                       <a:solidFill>
-                        <a:srgbClr val="E9E4DA"/>
+                        <a:srgbClr val="E6E1D8"/>
                       </a:solidFill>
                       <a:prstDash val="solid"/>
                       <a:round/>
@@ -11636,7 +11714,7 @@
                     </a:lnL>
                     <a:lnR w="6350" cap="flat" cmpd="sng" algn="ctr">
                       <a:solidFill>
-                        <a:srgbClr val="E9E4DA"/>
+                        <a:srgbClr val="E6E1D8"/>
                       </a:solidFill>
                       <a:prstDash val="solid"/>
                       <a:round/>
@@ -11645,7 +11723,7 @@
                     </a:lnR>
                     <a:lnT w="6350" cap="flat" cmpd="sng" algn="ctr">
                       <a:solidFill>
-                        <a:srgbClr val="E9E4DA"/>
+                        <a:srgbClr val="E6E1D8"/>
                       </a:solidFill>
                       <a:prstDash val="solid"/>
                       <a:round/>
@@ -11654,7 +11732,7 @@
                     </a:lnT>
                     <a:lnB w="6350" cap="flat" cmpd="sng" algn="ctr">
                       <a:solidFill>
-                        <a:srgbClr val="E9E4DA"/>
+                        <a:srgbClr val="E6E1D8"/>
                       </a:solidFill>
                       <a:prstDash val="solid"/>
                       <a:round/>
@@ -11662,7 +11740,7 @@
                       <a:tailEnd type="none" w="med" len="med"/>
                     </a:lnB>
                     <a:solidFill>
-                      <a:srgbClr val="F4F1EA"/>
+                      <a:srgbClr val="F4F1EB"/>
                     </a:solidFill>
                   </a:tcPr>
                 </a:tc>
@@ -11677,7 +11755,7 @@
                       <a:r>
                         <a:rPr lang="en-US" sz="1050" b="1" dirty="0">
                           <a:solidFill>
-                            <a:srgbClr val="0B0B0B"/>
+                            <a:srgbClr val="0E2238"/>
                           </a:solidFill>
                           <a:latin typeface="+mn-lt" pitchFamily="34" charset="0"/>
                           <a:ea typeface="+mn-lt" pitchFamily="34" charset="-122"/>
@@ -11695,7 +11773,7 @@
                   <a:tcPr marL="91440" marR="91440" marT="45720" marB="45720" anchor="ctr">
                     <a:lnL w="6350" cap="flat" cmpd="sng" algn="ctr">
                       <a:solidFill>
-                        <a:srgbClr val="E9E4DA"/>
+                        <a:srgbClr val="E6E1D8"/>
                       </a:solidFill>
                       <a:prstDash val="solid"/>
                       <a:round/>
@@ -11704,7 +11782,7 @@
                     </a:lnL>
                     <a:lnR w="6350" cap="flat" cmpd="sng" algn="ctr">
                       <a:solidFill>
-                        <a:srgbClr val="E9E4DA"/>
+                        <a:srgbClr val="E6E1D8"/>
                       </a:solidFill>
                       <a:prstDash val="solid"/>
                       <a:round/>
@@ -11713,7 +11791,7 @@
                     </a:lnR>
                     <a:lnT w="6350" cap="flat" cmpd="sng" algn="ctr">
                       <a:solidFill>
-                        <a:srgbClr val="E9E4DA"/>
+                        <a:srgbClr val="E6E1D8"/>
                       </a:solidFill>
                       <a:prstDash val="solid"/>
                       <a:round/>
@@ -11722,7 +11800,7 @@
                     </a:lnT>
                     <a:lnB w="6350" cap="flat" cmpd="sng" algn="ctr">
                       <a:solidFill>
-                        <a:srgbClr val="E9E4DA"/>
+                        <a:srgbClr val="E6E1D8"/>
                       </a:solidFill>
                       <a:prstDash val="solid"/>
                       <a:round/>
@@ -11730,7 +11808,7 @@
                       <a:tailEnd type="none" w="med" len="med"/>
                     </a:lnB>
                     <a:solidFill>
-                      <a:srgbClr val="F4F1EA"/>
+                      <a:srgbClr val="F4F1EB"/>
                     </a:solidFill>
                   </a:tcPr>
                 </a:tc>
@@ -11747,7 +11825,7 @@
                       <a:r>
                         <a:rPr lang="en-US" sz="1050" dirty="0">
                           <a:solidFill>
-                            <a:srgbClr val="2A2D33"/>
+                            <a:srgbClr val="1F3A52"/>
                           </a:solidFill>
                           <a:latin typeface="+mn-lt" pitchFamily="34" charset="0"/>
                           <a:ea typeface="+mn-lt" pitchFamily="34" charset="-122"/>
@@ -11765,7 +11843,7 @@
                   <a:tcPr marL="91440" marR="91440" marT="45720" marB="45720" anchor="ctr">
                     <a:lnL w="6350" cap="flat" cmpd="sng" algn="ctr">
                       <a:solidFill>
-                        <a:srgbClr val="E9E4DA"/>
+                        <a:srgbClr val="E6E1D8"/>
                       </a:solidFill>
                       <a:prstDash val="solid"/>
                       <a:round/>
@@ -11774,7 +11852,7 @@
                     </a:lnL>
                     <a:lnR w="6350" cap="flat" cmpd="sng" algn="ctr">
                       <a:solidFill>
-                        <a:srgbClr val="E9E4DA"/>
+                        <a:srgbClr val="E6E1D8"/>
                       </a:solidFill>
                       <a:prstDash val="solid"/>
                       <a:round/>
@@ -11783,7 +11861,7 @@
                     </a:lnR>
                     <a:lnT w="6350" cap="flat" cmpd="sng" algn="ctr">
                       <a:solidFill>
-                        <a:srgbClr val="E9E4DA"/>
+                        <a:srgbClr val="E6E1D8"/>
                       </a:solidFill>
                       <a:prstDash val="solid"/>
                       <a:round/>
@@ -11792,7 +11870,7 @@
                     </a:lnT>
                     <a:lnB w="6350" cap="flat" cmpd="sng" algn="ctr">
                       <a:solidFill>
-                        <a:srgbClr val="E9E4DA"/>
+                        <a:srgbClr val="E6E1D8"/>
                       </a:solidFill>
                       <a:prstDash val="solid"/>
                       <a:round/>
@@ -11815,7 +11893,7 @@
                       <a:r>
                         <a:rPr lang="en-US" sz="1050" dirty="0">
                           <a:solidFill>
-                            <a:srgbClr val="2A2D33"/>
+                            <a:srgbClr val="1F3A52"/>
                           </a:solidFill>
                           <a:latin typeface="+mn-lt" pitchFamily="34" charset="0"/>
                           <a:ea typeface="+mn-lt" pitchFamily="34" charset="-122"/>
@@ -11833,7 +11911,7 @@
                   <a:tcPr marL="91440" marR="91440" marT="45720" marB="45720" anchor="ctr">
                     <a:lnL w="6350" cap="flat" cmpd="sng" algn="ctr">
                       <a:solidFill>
-                        <a:srgbClr val="E9E4DA"/>
+                        <a:srgbClr val="E6E1D8"/>
                       </a:solidFill>
                       <a:prstDash val="solid"/>
                       <a:round/>
@@ -11842,7 +11920,7 @@
                     </a:lnL>
                     <a:lnR w="6350" cap="flat" cmpd="sng" algn="ctr">
                       <a:solidFill>
-                        <a:srgbClr val="E9E4DA"/>
+                        <a:srgbClr val="E6E1D8"/>
                       </a:solidFill>
                       <a:prstDash val="solid"/>
                       <a:round/>
@@ -11851,7 +11929,7 @@
                     </a:lnR>
                     <a:lnT w="6350" cap="flat" cmpd="sng" algn="ctr">
                       <a:solidFill>
-                        <a:srgbClr val="E9E4DA"/>
+                        <a:srgbClr val="E6E1D8"/>
                       </a:solidFill>
                       <a:prstDash val="solid"/>
                       <a:round/>
@@ -11860,7 +11938,7 @@
                     </a:lnT>
                     <a:lnB w="6350" cap="flat" cmpd="sng" algn="ctr">
                       <a:solidFill>
-                        <a:srgbClr val="E9E4DA"/>
+                        <a:srgbClr val="E6E1D8"/>
                       </a:solidFill>
                       <a:prstDash val="solid"/>
                       <a:round/>
@@ -11883,7 +11961,7 @@
                       <a:r>
                         <a:rPr lang="en-US" sz="1050" b="1" dirty="0">
                           <a:solidFill>
-                            <a:srgbClr val="0B0B0B"/>
+                            <a:srgbClr val="0E2238"/>
                           </a:solidFill>
                           <a:latin typeface="+mn-lt" pitchFamily="34" charset="0"/>
                           <a:ea typeface="+mn-lt" pitchFamily="34" charset="-122"/>
@@ -11901,7 +11979,7 @@
                   <a:tcPr marL="91440" marR="91440" marT="45720" marB="45720" anchor="ctr">
                     <a:lnL w="6350" cap="flat" cmpd="sng" algn="ctr">
                       <a:solidFill>
-                        <a:srgbClr val="E9E4DA"/>
+                        <a:srgbClr val="E6E1D8"/>
                       </a:solidFill>
                       <a:prstDash val="solid"/>
                       <a:round/>
@@ -11910,7 +11988,7 @@
                     </a:lnL>
                     <a:lnR w="6350" cap="flat" cmpd="sng" algn="ctr">
                       <a:solidFill>
-                        <a:srgbClr val="E9E4DA"/>
+                        <a:srgbClr val="E6E1D8"/>
                       </a:solidFill>
                       <a:prstDash val="solid"/>
                       <a:round/>
@@ -11919,7 +11997,7 @@
                     </a:lnR>
                     <a:lnT w="6350" cap="flat" cmpd="sng" algn="ctr">
                       <a:solidFill>
-                        <a:srgbClr val="E9E4DA"/>
+                        <a:srgbClr val="E6E1D8"/>
                       </a:solidFill>
                       <a:prstDash val="solid"/>
                       <a:round/>
@@ -11928,7 +12006,7 @@
                     </a:lnT>
                     <a:lnB w="6350" cap="flat" cmpd="sng" algn="ctr">
                       <a:solidFill>
-                        <a:srgbClr val="E9E4DA"/>
+                        <a:srgbClr val="E6E1D8"/>
                       </a:solidFill>
                       <a:prstDash val="solid"/>
                       <a:round/>
@@ -11953,7 +12031,7 @@
                       <a:r>
                         <a:rPr lang="en-US" sz="1050" dirty="0">
                           <a:solidFill>
-                            <a:srgbClr val="2A2D33"/>
+                            <a:srgbClr val="1F3A52"/>
                           </a:solidFill>
                           <a:latin typeface="+mn-lt" pitchFamily="34" charset="0"/>
                           <a:ea typeface="+mn-lt" pitchFamily="34" charset="-122"/>
@@ -11971,7 +12049,7 @@
                   <a:tcPr marL="91440" marR="91440" marT="45720" marB="45720" anchor="ctr">
                     <a:lnL w="6350" cap="flat" cmpd="sng" algn="ctr">
                       <a:solidFill>
-                        <a:srgbClr val="E9E4DA"/>
+                        <a:srgbClr val="E6E1D8"/>
                       </a:solidFill>
                       <a:prstDash val="solid"/>
                       <a:round/>
@@ -11980,7 +12058,7 @@
                     </a:lnL>
                     <a:lnR w="6350" cap="flat" cmpd="sng" algn="ctr">
                       <a:solidFill>
-                        <a:srgbClr val="E9E4DA"/>
+                        <a:srgbClr val="E6E1D8"/>
                       </a:solidFill>
                       <a:prstDash val="solid"/>
                       <a:round/>
@@ -11989,7 +12067,7 @@
                     </a:lnR>
                     <a:lnT w="6350" cap="flat" cmpd="sng" algn="ctr">
                       <a:solidFill>
-                        <a:srgbClr val="E9E4DA"/>
+                        <a:srgbClr val="E6E1D8"/>
                       </a:solidFill>
                       <a:prstDash val="solid"/>
                       <a:round/>
@@ -11998,7 +12076,7 @@
                     </a:lnT>
                     <a:lnB w="6350" cap="flat" cmpd="sng" algn="ctr">
                       <a:solidFill>
-                        <a:srgbClr val="E9E4DA"/>
+                        <a:srgbClr val="E6E1D8"/>
                       </a:solidFill>
                       <a:prstDash val="solid"/>
                       <a:round/>
@@ -12006,7 +12084,7 @@
                       <a:tailEnd type="none" w="med" len="med"/>
                     </a:lnB>
                     <a:solidFill>
-                      <a:srgbClr val="F4F1EA"/>
+                      <a:srgbClr val="F4F1EB"/>
                     </a:solidFill>
                   </a:tcPr>
                 </a:tc>
@@ -12021,7 +12099,7 @@
                       <a:r>
                         <a:rPr lang="en-US" sz="1050" dirty="0">
                           <a:solidFill>
-                            <a:srgbClr val="2A2D33"/>
+                            <a:srgbClr val="1F3A52"/>
                           </a:solidFill>
                           <a:latin typeface="+mn-lt" pitchFamily="34" charset="0"/>
                           <a:ea typeface="+mn-lt" pitchFamily="34" charset="-122"/>
@@ -12039,7 +12117,7 @@
                   <a:tcPr marL="91440" marR="91440" marT="45720" marB="45720" anchor="ctr">
                     <a:lnL w="6350" cap="flat" cmpd="sng" algn="ctr">
                       <a:solidFill>
-                        <a:srgbClr val="E9E4DA"/>
+                        <a:srgbClr val="E6E1D8"/>
                       </a:solidFill>
                       <a:prstDash val="solid"/>
                       <a:round/>
@@ -12048,7 +12126,7 @@
                     </a:lnL>
                     <a:lnR w="6350" cap="flat" cmpd="sng" algn="ctr">
                       <a:solidFill>
-                        <a:srgbClr val="E9E4DA"/>
+                        <a:srgbClr val="E6E1D8"/>
                       </a:solidFill>
                       <a:prstDash val="solid"/>
                       <a:round/>
@@ -12057,7 +12135,7 @@
                     </a:lnR>
                     <a:lnT w="6350" cap="flat" cmpd="sng" algn="ctr">
                       <a:solidFill>
-                        <a:srgbClr val="E9E4DA"/>
+                        <a:srgbClr val="E6E1D8"/>
                       </a:solidFill>
                       <a:prstDash val="solid"/>
                       <a:round/>
@@ -12066,7 +12144,7 @@
                     </a:lnT>
                     <a:lnB w="6350" cap="flat" cmpd="sng" algn="ctr">
                       <a:solidFill>
-                        <a:srgbClr val="E9E4DA"/>
+                        <a:srgbClr val="E6E1D8"/>
                       </a:solidFill>
                       <a:prstDash val="solid"/>
                       <a:round/>
@@ -12074,7 +12152,7 @@
                       <a:tailEnd type="none" w="med" len="med"/>
                     </a:lnB>
                     <a:solidFill>
-                      <a:srgbClr val="F4F1EA"/>
+                      <a:srgbClr val="F4F1EB"/>
                     </a:solidFill>
                   </a:tcPr>
                 </a:tc>
@@ -12089,7 +12167,7 @@
                       <a:r>
                         <a:rPr lang="en-US" sz="1050" b="1" dirty="0">
                           <a:solidFill>
-                            <a:srgbClr val="0B0B0B"/>
+                            <a:srgbClr val="0E2238"/>
                           </a:solidFill>
                           <a:latin typeface="+mn-lt" pitchFamily="34" charset="0"/>
                           <a:ea typeface="+mn-lt" pitchFamily="34" charset="-122"/>
@@ -12107,7 +12185,7 @@
                   <a:tcPr marL="91440" marR="91440" marT="45720" marB="45720" anchor="ctr">
                     <a:lnL w="6350" cap="flat" cmpd="sng" algn="ctr">
                       <a:solidFill>
-                        <a:srgbClr val="E9E4DA"/>
+                        <a:srgbClr val="E6E1D8"/>
                       </a:solidFill>
                       <a:prstDash val="solid"/>
                       <a:round/>
@@ -12116,7 +12194,7 @@
                     </a:lnL>
                     <a:lnR w="6350" cap="flat" cmpd="sng" algn="ctr">
                       <a:solidFill>
-                        <a:srgbClr val="E9E4DA"/>
+                        <a:srgbClr val="E6E1D8"/>
                       </a:solidFill>
                       <a:prstDash val="solid"/>
                       <a:round/>
@@ -12125,7 +12203,7 @@
                     </a:lnR>
                     <a:lnT w="6350" cap="flat" cmpd="sng" algn="ctr">
                       <a:solidFill>
-                        <a:srgbClr val="E9E4DA"/>
+                        <a:srgbClr val="E6E1D8"/>
                       </a:solidFill>
                       <a:prstDash val="solid"/>
                       <a:round/>
@@ -12134,7 +12212,7 @@
                     </a:lnT>
                     <a:lnB w="6350" cap="flat" cmpd="sng" algn="ctr">
                       <a:solidFill>
-                        <a:srgbClr val="E9E4DA"/>
+                        <a:srgbClr val="E6E1D8"/>
                       </a:solidFill>
                       <a:prstDash val="solid"/>
                       <a:round/>
@@ -12142,7 +12220,7 @@
                       <a:tailEnd type="none" w="med" len="med"/>
                     </a:lnB>
                     <a:solidFill>
-                      <a:srgbClr val="F4F1EA"/>
+                      <a:srgbClr val="F4F1EB"/>
                     </a:solidFill>
                   </a:tcPr>
                 </a:tc>
@@ -12159,7 +12237,7 @@
                       <a:r>
                         <a:rPr lang="en-US" sz="1050" dirty="0">
                           <a:solidFill>
-                            <a:srgbClr val="2A2D33"/>
+                            <a:srgbClr val="1F3A52"/>
                           </a:solidFill>
                           <a:latin typeface="+mn-lt" pitchFamily="34" charset="0"/>
                           <a:ea typeface="+mn-lt" pitchFamily="34" charset="-122"/>
@@ -12177,7 +12255,7 @@
                   <a:tcPr marL="91440" marR="91440" marT="45720" marB="45720" anchor="ctr">
                     <a:lnL w="6350" cap="flat" cmpd="sng" algn="ctr">
                       <a:solidFill>
-                        <a:srgbClr val="E9E4DA"/>
+                        <a:srgbClr val="E6E1D8"/>
                       </a:solidFill>
                       <a:prstDash val="solid"/>
                       <a:round/>
@@ -12186,7 +12264,7 @@
                     </a:lnL>
                     <a:lnR w="6350" cap="flat" cmpd="sng" algn="ctr">
                       <a:solidFill>
-                        <a:srgbClr val="E9E4DA"/>
+                        <a:srgbClr val="E6E1D8"/>
                       </a:solidFill>
                       <a:prstDash val="solid"/>
                       <a:round/>
@@ -12195,7 +12273,7 @@
                     </a:lnR>
                     <a:lnT w="6350" cap="flat" cmpd="sng" algn="ctr">
                       <a:solidFill>
-                        <a:srgbClr val="E9E4DA"/>
+                        <a:srgbClr val="E6E1D8"/>
                       </a:solidFill>
                       <a:prstDash val="solid"/>
                       <a:round/>
@@ -12204,7 +12282,7 @@
                     </a:lnT>
                     <a:lnB w="6350" cap="flat" cmpd="sng" algn="ctr">
                       <a:solidFill>
-                        <a:srgbClr val="E9E4DA"/>
+                        <a:srgbClr val="E6E1D8"/>
                       </a:solidFill>
                       <a:prstDash val="solid"/>
                       <a:round/>
@@ -12227,7 +12305,7 @@
                       <a:r>
                         <a:rPr lang="en-US" sz="1050" dirty="0">
                           <a:solidFill>
-                            <a:srgbClr val="2A2D33"/>
+                            <a:srgbClr val="1F3A52"/>
                           </a:solidFill>
                           <a:latin typeface="+mn-lt" pitchFamily="34" charset="0"/>
                           <a:ea typeface="+mn-lt" pitchFamily="34" charset="-122"/>
@@ -12245,7 +12323,7 @@
                   <a:tcPr marL="91440" marR="91440" marT="45720" marB="45720" anchor="ctr">
                     <a:lnL w="6350" cap="flat" cmpd="sng" algn="ctr">
                       <a:solidFill>
-                        <a:srgbClr val="E9E4DA"/>
+                        <a:srgbClr val="E6E1D8"/>
                       </a:solidFill>
                       <a:prstDash val="solid"/>
                       <a:round/>
@@ -12254,7 +12332,7 @@
                     </a:lnL>
                     <a:lnR w="6350" cap="flat" cmpd="sng" algn="ctr">
                       <a:solidFill>
-                        <a:srgbClr val="E9E4DA"/>
+                        <a:srgbClr val="E6E1D8"/>
                       </a:solidFill>
                       <a:prstDash val="solid"/>
                       <a:round/>
@@ -12263,7 +12341,7 @@
                     </a:lnR>
                     <a:lnT w="6350" cap="flat" cmpd="sng" algn="ctr">
                       <a:solidFill>
-                        <a:srgbClr val="E9E4DA"/>
+                        <a:srgbClr val="E6E1D8"/>
                       </a:solidFill>
                       <a:prstDash val="solid"/>
                       <a:round/>
@@ -12272,7 +12350,7 @@
                     </a:lnT>
                     <a:lnB w="6350" cap="flat" cmpd="sng" algn="ctr">
                       <a:solidFill>
-                        <a:srgbClr val="E9E4DA"/>
+                        <a:srgbClr val="E6E1D8"/>
                       </a:solidFill>
                       <a:prstDash val="solid"/>
                       <a:round/>
@@ -12295,7 +12373,7 @@
                       <a:r>
                         <a:rPr lang="en-US" sz="1050" b="1" dirty="0">
                           <a:solidFill>
-                            <a:srgbClr val="0B0B0B"/>
+                            <a:srgbClr val="0E2238"/>
                           </a:solidFill>
                           <a:latin typeface="+mn-lt" pitchFamily="34" charset="0"/>
                           <a:ea typeface="+mn-lt" pitchFamily="34" charset="-122"/>
@@ -12313,7 +12391,7 @@
                   <a:tcPr marL="91440" marR="91440" marT="45720" marB="45720" anchor="ctr">
                     <a:lnL w="6350" cap="flat" cmpd="sng" algn="ctr">
                       <a:solidFill>
-                        <a:srgbClr val="E9E4DA"/>
+                        <a:srgbClr val="E6E1D8"/>
                       </a:solidFill>
                       <a:prstDash val="solid"/>
                       <a:round/>
@@ -12322,7 +12400,7 @@
                     </a:lnL>
                     <a:lnR w="6350" cap="flat" cmpd="sng" algn="ctr">
                       <a:solidFill>
-                        <a:srgbClr val="E9E4DA"/>
+                        <a:srgbClr val="E6E1D8"/>
                       </a:solidFill>
                       <a:prstDash val="solid"/>
                       <a:round/>
@@ -12331,7 +12409,7 @@
                     </a:lnR>
                     <a:lnT w="6350" cap="flat" cmpd="sng" algn="ctr">
                       <a:solidFill>
-                        <a:srgbClr val="E9E4DA"/>
+                        <a:srgbClr val="E6E1D8"/>
                       </a:solidFill>
                       <a:prstDash val="solid"/>
                       <a:round/>
@@ -12340,7 +12418,7 @@
                     </a:lnT>
                     <a:lnB w="6350" cap="flat" cmpd="sng" algn="ctr">
                       <a:solidFill>
-                        <a:srgbClr val="E9E4DA"/>
+                        <a:srgbClr val="E6E1D8"/>
                       </a:solidFill>
                       <a:prstDash val="solid"/>
                       <a:round/>
@@ -12365,7 +12443,7 @@
                       <a:r>
                         <a:rPr lang="en-US" sz="1050" dirty="0">
                           <a:solidFill>
-                            <a:srgbClr val="2A2D33"/>
+                            <a:srgbClr val="1F3A52"/>
                           </a:solidFill>
                           <a:latin typeface="+mn-lt" pitchFamily="34" charset="0"/>
                           <a:ea typeface="+mn-lt" pitchFamily="34" charset="-122"/>
@@ -12383,7 +12461,7 @@
                   <a:tcPr marL="91440" marR="91440" marT="45720" marB="45720" anchor="ctr">
                     <a:lnL w="6350" cap="flat" cmpd="sng" algn="ctr">
                       <a:solidFill>
-                        <a:srgbClr val="E9E4DA"/>
+                        <a:srgbClr val="E6E1D8"/>
                       </a:solidFill>
                       <a:prstDash val="solid"/>
                       <a:round/>
@@ -12392,7 +12470,7 @@
                     </a:lnL>
                     <a:lnR w="6350" cap="flat" cmpd="sng" algn="ctr">
                       <a:solidFill>
-                        <a:srgbClr val="E9E4DA"/>
+                        <a:srgbClr val="E6E1D8"/>
                       </a:solidFill>
                       <a:prstDash val="solid"/>
                       <a:round/>
@@ -12401,7 +12479,7 @@
                     </a:lnR>
                     <a:lnT w="6350" cap="flat" cmpd="sng" algn="ctr">
                       <a:solidFill>
-                        <a:srgbClr val="E9E4DA"/>
+                        <a:srgbClr val="E6E1D8"/>
                       </a:solidFill>
                       <a:prstDash val="solid"/>
                       <a:round/>
@@ -12410,7 +12488,7 @@
                     </a:lnT>
                     <a:lnB w="6350" cap="flat" cmpd="sng" algn="ctr">
                       <a:solidFill>
-                        <a:srgbClr val="E9E4DA"/>
+                        <a:srgbClr val="E6E1D8"/>
                       </a:solidFill>
                       <a:prstDash val="solid"/>
                       <a:round/>
@@ -12418,7 +12496,7 @@
                       <a:tailEnd type="none" w="med" len="med"/>
                     </a:lnB>
                     <a:solidFill>
-                      <a:srgbClr val="F4F1EA"/>
+                      <a:srgbClr val="F4F1EB"/>
                     </a:solidFill>
                   </a:tcPr>
                 </a:tc>
@@ -12433,7 +12511,7 @@
                       <a:r>
                         <a:rPr lang="en-US" sz="1050" dirty="0">
                           <a:solidFill>
-                            <a:srgbClr val="2A2D33"/>
+                            <a:srgbClr val="1F3A52"/>
                           </a:solidFill>
                           <a:latin typeface="+mn-lt" pitchFamily="34" charset="0"/>
                           <a:ea typeface="+mn-lt" pitchFamily="34" charset="-122"/>
@@ -12451,7 +12529,7 @@
                   <a:tcPr marL="91440" marR="91440" marT="45720" marB="45720" anchor="ctr">
                     <a:lnL w="6350" cap="flat" cmpd="sng" algn="ctr">
                       <a:solidFill>
-                        <a:srgbClr val="E9E4DA"/>
+                        <a:srgbClr val="E6E1D8"/>
                       </a:solidFill>
                       <a:prstDash val="solid"/>
                       <a:round/>
@@ -12460,7 +12538,7 @@
                     </a:lnL>
                     <a:lnR w="6350" cap="flat" cmpd="sng" algn="ctr">
                       <a:solidFill>
-                        <a:srgbClr val="E9E4DA"/>
+                        <a:srgbClr val="E6E1D8"/>
                       </a:solidFill>
                       <a:prstDash val="solid"/>
                       <a:round/>
@@ -12469,7 +12547,7 @@
                     </a:lnR>
                     <a:lnT w="6350" cap="flat" cmpd="sng" algn="ctr">
                       <a:solidFill>
-                        <a:srgbClr val="E9E4DA"/>
+                        <a:srgbClr val="E6E1D8"/>
                       </a:solidFill>
                       <a:prstDash val="solid"/>
                       <a:round/>
@@ -12478,7 +12556,7 @@
                     </a:lnT>
                     <a:lnB w="6350" cap="flat" cmpd="sng" algn="ctr">
                       <a:solidFill>
-                        <a:srgbClr val="E9E4DA"/>
+                        <a:srgbClr val="E6E1D8"/>
                       </a:solidFill>
                       <a:prstDash val="solid"/>
                       <a:round/>
@@ -12486,7 +12564,7 @@
                       <a:tailEnd type="none" w="med" len="med"/>
                     </a:lnB>
                     <a:solidFill>
-                      <a:srgbClr val="F4F1EA"/>
+                      <a:srgbClr val="F4F1EB"/>
                     </a:solidFill>
                   </a:tcPr>
                 </a:tc>
@@ -12501,7 +12579,7 @@
                       <a:r>
                         <a:rPr lang="en-US" sz="1050" b="1" dirty="0">
                           <a:solidFill>
-                            <a:srgbClr val="0B0B0B"/>
+                            <a:srgbClr val="0E2238"/>
                           </a:solidFill>
                           <a:latin typeface="+mn-lt" pitchFamily="34" charset="0"/>
                           <a:ea typeface="+mn-lt" pitchFamily="34" charset="-122"/>
@@ -12519,7 +12597,7 @@
                   <a:tcPr marL="91440" marR="91440" marT="45720" marB="45720" anchor="ctr">
                     <a:lnL w="6350" cap="flat" cmpd="sng" algn="ctr">
                       <a:solidFill>
-                        <a:srgbClr val="E9E4DA"/>
+                        <a:srgbClr val="E6E1D8"/>
                       </a:solidFill>
                       <a:prstDash val="solid"/>
                       <a:round/>
@@ -12528,7 +12606,7 @@
                     </a:lnL>
                     <a:lnR w="6350" cap="flat" cmpd="sng" algn="ctr">
                       <a:solidFill>
-                        <a:srgbClr val="E9E4DA"/>
+                        <a:srgbClr val="E6E1D8"/>
                       </a:solidFill>
                       <a:prstDash val="solid"/>
                       <a:round/>
@@ -12537,7 +12615,7 @@
                     </a:lnR>
                     <a:lnT w="6350" cap="flat" cmpd="sng" algn="ctr">
                       <a:solidFill>
-                        <a:srgbClr val="E9E4DA"/>
+                        <a:srgbClr val="E6E1D8"/>
                       </a:solidFill>
                       <a:prstDash val="solid"/>
                       <a:round/>
@@ -12546,7 +12624,7 @@
                     </a:lnT>
                     <a:lnB w="6350" cap="flat" cmpd="sng" algn="ctr">
                       <a:solidFill>
-                        <a:srgbClr val="E9E4DA"/>
+                        <a:srgbClr val="E6E1D8"/>
                       </a:solidFill>
                       <a:prstDash val="solid"/>
                       <a:round/>
@@ -12554,7 +12632,7 @@
                       <a:tailEnd type="none" w="med" len="med"/>
                     </a:lnB>
                     <a:solidFill>
-                      <a:srgbClr val="F4F1EA"/>
+                      <a:srgbClr val="F4F1EB"/>
                     </a:solidFill>
                   </a:tcPr>
                 </a:tc>
@@ -12571,7 +12649,7 @@
                       <a:r>
                         <a:rPr lang="en-US" sz="1050" dirty="0">
                           <a:solidFill>
-                            <a:srgbClr val="2A2D33"/>
+                            <a:srgbClr val="1F3A52"/>
                           </a:solidFill>
                           <a:latin typeface="+mn-lt" pitchFamily="34" charset="0"/>
                           <a:ea typeface="+mn-lt" pitchFamily="34" charset="-122"/>
@@ -12589,7 +12667,7 @@
                   <a:tcPr marL="91440" marR="91440" marT="45720" marB="45720" anchor="ctr">
                     <a:lnL w="6350" cap="flat" cmpd="sng" algn="ctr">
                       <a:solidFill>
-                        <a:srgbClr val="E9E4DA"/>
+                        <a:srgbClr val="E6E1D8"/>
                       </a:solidFill>
                       <a:prstDash val="solid"/>
                       <a:round/>
@@ -12598,7 +12676,7 @@
                     </a:lnL>
                     <a:lnR w="6350" cap="flat" cmpd="sng" algn="ctr">
                       <a:solidFill>
-                        <a:srgbClr val="E9E4DA"/>
+                        <a:srgbClr val="E6E1D8"/>
                       </a:solidFill>
                       <a:prstDash val="solid"/>
                       <a:round/>
@@ -12607,7 +12685,7 @@
                     </a:lnR>
                     <a:lnT w="6350" cap="flat" cmpd="sng" algn="ctr">
                       <a:solidFill>
-                        <a:srgbClr val="E9E4DA"/>
+                        <a:srgbClr val="E6E1D8"/>
                       </a:solidFill>
                       <a:prstDash val="solid"/>
                       <a:round/>
@@ -12616,7 +12694,7 @@
                     </a:lnT>
                     <a:lnB w="6350" cap="flat" cmpd="sng" algn="ctr">
                       <a:solidFill>
-                        <a:srgbClr val="E9E4DA"/>
+                        <a:srgbClr val="E6E1D8"/>
                       </a:solidFill>
                       <a:prstDash val="solid"/>
                       <a:round/>
@@ -12639,7 +12717,7 @@
                       <a:r>
                         <a:rPr lang="en-US" sz="1050" dirty="0">
                           <a:solidFill>
-                            <a:srgbClr val="2A2D33"/>
+                            <a:srgbClr val="1F3A52"/>
                           </a:solidFill>
                           <a:latin typeface="+mn-lt" pitchFamily="34" charset="0"/>
                           <a:ea typeface="+mn-lt" pitchFamily="34" charset="-122"/>
@@ -12657,7 +12735,7 @@
                   <a:tcPr marL="91440" marR="91440" marT="45720" marB="45720" anchor="ctr">
                     <a:lnL w="6350" cap="flat" cmpd="sng" algn="ctr">
                       <a:solidFill>
-                        <a:srgbClr val="E9E4DA"/>
+                        <a:srgbClr val="E6E1D8"/>
                       </a:solidFill>
                       <a:prstDash val="solid"/>
                       <a:round/>
@@ -12666,7 +12744,7 @@
                     </a:lnL>
                     <a:lnR w="6350" cap="flat" cmpd="sng" algn="ctr">
                       <a:solidFill>
-                        <a:srgbClr val="E9E4DA"/>
+                        <a:srgbClr val="E6E1D8"/>
                       </a:solidFill>
                       <a:prstDash val="solid"/>
                       <a:round/>
@@ -12675,7 +12753,7 @@
                     </a:lnR>
                     <a:lnT w="6350" cap="flat" cmpd="sng" algn="ctr">
                       <a:solidFill>
-                        <a:srgbClr val="E9E4DA"/>
+                        <a:srgbClr val="E6E1D8"/>
                       </a:solidFill>
                       <a:prstDash val="solid"/>
                       <a:round/>
@@ -12684,7 +12762,7 @@
                     </a:lnT>
                     <a:lnB w="6350" cap="flat" cmpd="sng" algn="ctr">
                       <a:solidFill>
-                        <a:srgbClr val="E9E4DA"/>
+                        <a:srgbClr val="E6E1D8"/>
                       </a:solidFill>
                       <a:prstDash val="solid"/>
                       <a:round/>
@@ -12707,7 +12785,7 @@
                       <a:r>
                         <a:rPr lang="en-US" sz="1050" b="1" dirty="0">
                           <a:solidFill>
-                            <a:srgbClr val="0B0B0B"/>
+                            <a:srgbClr val="0E2238"/>
                           </a:solidFill>
                           <a:latin typeface="+mn-lt" pitchFamily="34" charset="0"/>
                           <a:ea typeface="+mn-lt" pitchFamily="34" charset="-122"/>
@@ -12725,7 +12803,7 @@
                   <a:tcPr marL="91440" marR="91440" marT="45720" marB="45720" anchor="ctr">
                     <a:lnL w="6350" cap="flat" cmpd="sng" algn="ctr">
                       <a:solidFill>
-                        <a:srgbClr val="E9E4DA"/>
+                        <a:srgbClr val="E6E1D8"/>
                       </a:solidFill>
                       <a:prstDash val="solid"/>
                       <a:round/>
@@ -12734,7 +12812,7 @@
                     </a:lnL>
                     <a:lnR w="6350" cap="flat" cmpd="sng" algn="ctr">
                       <a:solidFill>
-                        <a:srgbClr val="E9E4DA"/>
+                        <a:srgbClr val="E6E1D8"/>
                       </a:solidFill>
                       <a:prstDash val="solid"/>
                       <a:round/>
@@ -12743,7 +12821,7 @@
                     </a:lnR>
                     <a:lnT w="6350" cap="flat" cmpd="sng" algn="ctr">
                       <a:solidFill>
-                        <a:srgbClr val="E9E4DA"/>
+                        <a:srgbClr val="E6E1D8"/>
                       </a:solidFill>
                       <a:prstDash val="solid"/>
                       <a:round/>
@@ -12752,7 +12830,7 @@
                     </a:lnT>
                     <a:lnB w="6350" cap="flat" cmpd="sng" algn="ctr">
                       <a:solidFill>
-                        <a:srgbClr val="E9E4DA"/>
+                        <a:srgbClr val="E6E1D8"/>
                       </a:solidFill>
                       <a:prstDash val="solid"/>
                       <a:round/>
@@ -12807,6 +12885,36 @@
       </p:sp>
       <p:sp>
         <p:nvSpPr>
+          <p:cNvPr id="6" name="Text 0"/>
+          <p:cNvSpPr/>
+          <p:nvPr>
+            <p:ph idx="101" type="title" hasCustomPrompt="1"/>
+          </p:nvPr>
+        </p:nvSpPr>
+        <p:spPr>
+          <a:xfrm>
+            <a:off x="457200" y="420624"/>
+            <a:ext cx="8229600" cy="731520"/>
+          </a:xfrm>
+          <a:prstGeom prst="rect">
+            <a:avLst/>
+          </a:prstGeom>
+          <a:noFill/>
+          <a:ln/>
+        </p:spPr>
+        <p:txBody>
+          <a:bodyPr wrap="square" lIns="0" tIns="0" rIns="0" bIns="0" rtlCol="0" anchor="t"/>
+          <a:lstStyle/>
+          <a:p>
+            <a:pPr algn="r" indent="0" marL="0">
+              <a:buNone/>
+            </a:pPr>
+            <a:endParaRPr lang="en-US" sz="2600" dirty="0"/>
+          </a:p>
+        </p:txBody>
+      </p:sp>
+      <p:sp>
+        <p:nvSpPr>
           <p:cNvPr id="25" name="Slide Number Placeholder 0"/>
           <p:cNvSpPr>
             <a:spLocks noGrp="1"/>
@@ -12835,7 +12943,7 @@
             <a:lvl1pPr>
               <a:defRPr sz="900">
                 <a:solidFill>
-                  <a:srgbClr val="6B6F76"/>
+                  <a:srgbClr val="6E7B88"/>
                 </a:solidFill>
               </a:defRPr>
             </a:lvl1pPr>
@@ -12877,16 +12985,14 @@
       </p:grpSpPr>
       <p:sp>
         <p:nvSpPr>
-          <p:cNvPr id="2" name="Text 3"/>
-          <p:cNvSpPr/>
-          <p:nvPr>
-            <p:ph idx="103" type="title" hasCustomPrompt="1"/>
-          </p:nvPr>
-        </p:nvSpPr>
-        <p:spPr>
-          <a:xfrm>
-            <a:off x="457200" y="347472"/>
-            <a:ext cx="8229600" cy="685800"/>
+          <p:cNvPr id="2" name="Text 0"/>
+          <p:cNvSpPr txBox="1"/>
+          <p:nvPr/>
+        </p:nvSpPr>
+        <p:spPr>
+          <a:xfrm>
+            <a:off x="457200" y="402336"/>
+            <a:ext cx="8229600" cy="749808"/>
           </a:xfrm>
           <a:prstGeom prst="rect">
             <a:avLst/>
@@ -12895,21 +13001,24 @@
           <a:ln/>
         </p:spPr>
         <p:txBody>
-          <a:bodyPr wrap="square" lIns="0" tIns="0" rIns="0" bIns="0" rtlCol="0" anchor="ctr"/>
+          <a:bodyPr wrap="square" lIns="0" tIns="0" rIns="0" bIns="0" rtlCol="0" anchor="t"/>
           <a:lstStyle/>
           <a:p>
             <a:pPr rtl="1" algn="r" indent="0" marL="0">
               <a:buNone/>
             </a:pPr>
             <a:r>
-              <a:rPr lang="en-US" sz="2600" b="1" dirty="0">
-                <a:solidFill>
-                  <a:srgbClr val="0B0B0B"/>
-                </a:solidFill>
+              <a:rPr lang="ar-AE" altLang="en-US" sz="2600" b="1" dirty="0">
+                <a:solidFill>
+                  <a:schemeClr val="tx1"/>
+                </a:solidFill>
+                <a:latin typeface="Cambria" pitchFamily="34" charset="0"/>
+                <a:ea typeface="Cambria" pitchFamily="34" charset="-122"/>
+                <a:cs typeface="Cambria" pitchFamily="34" charset="-120"/>
               </a:rPr>
               <a:t>كيف نعمل معك</a:t>
             </a:r>
-            <a:endParaRPr lang="en-US" sz="2600" dirty="0"/>
+            <a:endParaRPr lang="ar-AE" sz="2600" dirty="0"/>
           </a:p>
         </p:txBody>
       </p:sp>
@@ -12966,7 +13075,7 @@
           <a:noFill/>
           <a:ln w="9525">
             <a:solidFill>
-              <a:srgbClr val="D8C39A"/>
+              <a:srgbClr val="D9B38C"/>
             </a:solidFill>
             <a:prstDash val="solid"/>
           </a:ln>
@@ -12987,11 +13096,11 @@
             <a:avLst/>
           </a:prstGeom>
           <a:solidFill>
-            <a:srgbClr val="0B0B0B"/>
+            <a:srgbClr val="0E2238"/>
           </a:solidFill>
           <a:ln w="12700">
             <a:solidFill>
-              <a:srgbClr val="B08D57"/>
+              <a:srgbClr val="B5723B"/>
             </a:solidFill>
             <a:prstDash val="solid"/>
           </a:ln>
@@ -13123,11 +13232,11 @@
             <a:avLst/>
           </a:prstGeom>
           <a:solidFill>
-            <a:srgbClr val="0B0B0B"/>
+            <a:srgbClr val="0E2238"/>
           </a:solidFill>
           <a:ln w="12700">
             <a:solidFill>
-              <a:srgbClr val="B08D57"/>
+              <a:srgbClr val="B5723B"/>
             </a:solidFill>
             <a:prstDash val="solid"/>
           </a:ln>
@@ -13259,11 +13368,11 @@
             <a:avLst/>
           </a:prstGeom>
           <a:solidFill>
-            <a:srgbClr val="0B0B0B"/>
+            <a:srgbClr val="0E2238"/>
           </a:solidFill>
           <a:ln w="12700">
             <a:solidFill>
-              <a:srgbClr val="B08D57"/>
+              <a:srgbClr val="B5723B"/>
             </a:solidFill>
             <a:prstDash val="solid"/>
           </a:ln>
@@ -13395,11 +13504,11 @@
             <a:avLst/>
           </a:prstGeom>
           <a:solidFill>
-            <a:srgbClr val="0B0B0B"/>
+            <a:srgbClr val="0E2238"/>
           </a:solidFill>
           <a:ln w="12700">
             <a:solidFill>
-              <a:srgbClr val="B08D57"/>
+              <a:srgbClr val="B5723B"/>
             </a:solidFill>
             <a:prstDash val="solid"/>
           </a:ln>
@@ -13531,11 +13640,11 @@
             <a:avLst/>
           </a:prstGeom>
           <a:solidFill>
-            <a:srgbClr val="0B0B0B"/>
+            <a:srgbClr val="0E2238"/>
           </a:solidFill>
           <a:ln w="12700">
             <a:solidFill>
-              <a:srgbClr val="B08D57"/>
+              <a:srgbClr val="B5723B"/>
             </a:solidFill>
             <a:prstDash val="solid"/>
           </a:ln>
@@ -13649,6 +13758,36 @@
               <a:t>لدى الجهة المختارة، مع متابعة مباشرة وتسليمك نسختك المسجلة.</a:t>
             </a:r>
             <a:endParaRPr lang="ar-AE" sz="1050" dirty="0"/>
+          </a:p>
+        </p:txBody>
+      </p:sp>
+      <p:sp>
+        <p:nvSpPr>
+          <p:cNvPr id="25" name="Text 0"/>
+          <p:cNvSpPr/>
+          <p:nvPr>
+            <p:ph idx="101" type="title" hasCustomPrompt="1"/>
+          </p:nvPr>
+        </p:nvSpPr>
+        <p:spPr>
+          <a:xfrm>
+            <a:off x="457200" y="420624"/>
+            <a:ext cx="8229600" cy="731520"/>
+          </a:xfrm>
+          <a:prstGeom prst="rect">
+            <a:avLst/>
+          </a:prstGeom>
+          <a:noFill/>
+          <a:ln/>
+        </p:spPr>
+        <p:txBody>
+          <a:bodyPr wrap="square" lIns="0" tIns="0" rIns="0" bIns="0" rtlCol="0" anchor="t"/>
+          <a:lstStyle/>
+          <a:p>
+            <a:pPr algn="r" indent="0" marL="0">
+              <a:buNone/>
+            </a:pPr>
+            <a:endParaRPr lang="en-US" sz="2600" dirty="0"/>
           </a:p>
         </p:txBody>
       </p:sp>
@@ -13682,7 +13821,7 @@
             <a:lvl1pPr>
               <a:defRPr sz="900">
                 <a:solidFill>
-                  <a:srgbClr val="6B6F76"/>
+                  <a:srgbClr val="6E7B88"/>
                 </a:solidFill>
               </a:defRPr>
             </a:lvl1pPr>
@@ -13706,47 +13845,47 @@
 </file>
 
 <file path=ppt/theme/theme1.xml><?xml version="1.0" encoding="utf-8"?>
-<a:theme xmlns:a="http://schemas.openxmlformats.org/drawingml/2006/main" name="RK Advocates">
+<a:theme xmlns:a="http://schemas.openxmlformats.org/drawingml/2006/main" name="Midnight Copper">
   <a:themeElements>
-    <a:clrScheme name="RK Advocates">
+    <a:clrScheme name="Midnight Copper">
       <a:dk1>
-        <a:srgbClr val="0B0B0B"/>
+        <a:srgbClr val="0E2238"/>
       </a:dk1>
       <a:lt1>
         <a:srgbClr val="FFFFFF"/>
       </a:lt1>
       <a:dk2>
-        <a:srgbClr val="2A2D33"/>
+        <a:srgbClr val="1F3A52"/>
       </a:dk2>
       <a:lt2>
-        <a:srgbClr val="F4F1EA"/>
+        <a:srgbClr val="F4F1EB"/>
       </a:lt2>
       <a:accent1>
-        <a:srgbClr val="B08D57"/>
+        <a:srgbClr val="B5723B"/>
       </a:accent1>
       <a:accent2>
-        <a:srgbClr val="D8C39A"/>
+        <a:srgbClr val="D9B38C"/>
       </a:accent2>
       <a:accent3>
-        <a:srgbClr val="6B6F76"/>
+        <a:srgbClr val="6E7B88"/>
       </a:accent3>
       <a:accent4>
-        <a:srgbClr val="8A6D3B"/>
+        <a:srgbClr val="8C5527"/>
       </a:accent4>
       <a:accent5>
-        <a:srgbClr val="E9E4DA"/>
+        <a:srgbClr val="E6E1D8"/>
       </a:accent5>
       <a:accent6>
-        <a:srgbClr val="15171B"/>
+        <a:srgbClr val="5B7A8C"/>
       </a:accent6>
       <a:hlink>
-        <a:srgbClr val="B08D57"/>
+        <a:srgbClr val="B5723B"/>
       </a:hlink>
       <a:folHlink>
-        <a:srgbClr val="8A6D3B"/>
+        <a:srgbClr val="8C5527"/>
       </a:folHlink>
     </a:clrScheme>
-    <a:fontScheme name="RK Advocates">
+    <a:fontScheme name="Midnight Copper">
       <a:majorFont>
         <a:latin typeface="Cambria"/>
         <a:ea typeface=""/>
